--- a/中越詩歌/耶和華祝福滿滿_Đức Giê-hô-va ban phước dư dật.pptx
+++ b/中越詩歌/耶和華祝福滿滿_Đức Giê-hô-va ban phước dư dật.pptx
@@ -9,14 +9,13 @@
     <p:sldId id="258" r:id="rId3"/>
     <p:sldId id="259" r:id="rId4"/>
     <p:sldId id="260" r:id="rId5"/>
-    <p:sldId id="261" r:id="rId6"/>
-    <p:sldId id="262" r:id="rId7"/>
-    <p:sldId id="263" r:id="rId8"/>
-    <p:sldId id="264" r:id="rId9"/>
-    <p:sldId id="265" r:id="rId10"/>
-    <p:sldId id="266" r:id="rId11"/>
-    <p:sldId id="267" r:id="rId12"/>
-    <p:sldId id="268" r:id="rId13"/>
+    <p:sldId id="262" r:id="rId6"/>
+    <p:sldId id="263" r:id="rId7"/>
+    <p:sldId id="264" r:id="rId8"/>
+    <p:sldId id="265" r:id="rId9"/>
+    <p:sldId id="266" r:id="rId10"/>
+    <p:sldId id="267" r:id="rId11"/>
+    <p:sldId id="268" r:id="rId12"/>
   </p:sldIdLst>
   <p:sldSz cx="12192000" cy="6858000"/>
   <p:notesSz cx="6858000" cy="9144000"/>
@@ -115,6 +114,11 @@
       </a:defRPr>
     </a:lvl9pPr>
   </p:defaultTextStyle>
+  <p:extLst>
+    <p:ext uri="{EFAFB233-063F-42B5-8137-9DF3F51BA10A}">
+      <p15:sldGuideLst xmlns:p15="http://schemas.microsoft.com/office/powerpoint/2012/main"/>
+    </p:ext>
+  </p:extLst>
 </p:presentation>
 </file>
 
@@ -156,7 +160,7 @@
           <a:lstStyle/>
           <a:p>
             <a:r>
-              <a:rPr lang="en-US" altLang="zh-TW" smtClean="0"/>
+              <a:rPr lang="en-US" altLang="zh-TW"/>
               <a:t>Click to edit Master title style</a:t>
             </a:r>
             <a:endParaRPr lang="zh-TW" altLang="en-US"/>
@@ -275,7 +279,7 @@
           </a:lstStyle>
           <a:p>
             <a:r>
-              <a:rPr lang="en-US" altLang="zh-TW" smtClean="0"/>
+              <a:rPr lang="en-US" altLang="zh-TW"/>
               <a:t>Click to edit Master subtitle style</a:t>
             </a:r>
             <a:endParaRPr lang="zh-TW" altLang="en-US"/>
@@ -299,7 +303,7 @@
           <a:p>
             <a:fld id="{0AEF4F30-AB30-4FDA-9026-B75B11F93046}" type="datetimeFigureOut">
               <a:rPr lang="vi-VN" smtClean="0"/>
-              <a:t>07/09/2022</a:t>
+              <a:t>23/02/2026</a:t>
             </a:fld>
             <a:endParaRPr lang="vi-VN"/>
           </a:p>
@@ -393,7 +397,7 @@
           <a:lstStyle/>
           <a:p>
             <a:r>
-              <a:rPr lang="en-US" altLang="zh-TW" smtClean="0"/>
+              <a:rPr lang="en-US" altLang="zh-TW"/>
               <a:t>Click to edit Master title style</a:t>
             </a:r>
             <a:endParaRPr lang="zh-TW" altLang="en-US"/>
@@ -417,35 +421,35 @@
           <a:p>
             <a:pPr lvl="0"/>
             <a:r>
-              <a:rPr lang="en-US" altLang="zh-TW" smtClean="0"/>
+              <a:rPr lang="en-US" altLang="zh-TW"/>
               <a:t>Edit Master text styles</a:t>
             </a:r>
           </a:p>
           <a:p>
             <a:pPr lvl="1"/>
             <a:r>
-              <a:rPr lang="en-US" altLang="zh-TW" smtClean="0"/>
+              <a:rPr lang="en-US" altLang="zh-TW"/>
               <a:t>Second level</a:t>
             </a:r>
           </a:p>
           <a:p>
             <a:pPr lvl="2"/>
             <a:r>
-              <a:rPr lang="en-US" altLang="zh-TW" smtClean="0"/>
+              <a:rPr lang="en-US" altLang="zh-TW"/>
               <a:t>Third level</a:t>
             </a:r>
           </a:p>
           <a:p>
             <a:pPr lvl="3"/>
             <a:r>
-              <a:rPr lang="en-US" altLang="zh-TW" smtClean="0"/>
+              <a:rPr lang="en-US" altLang="zh-TW"/>
               <a:t>Fourth level</a:t>
             </a:r>
           </a:p>
           <a:p>
             <a:pPr lvl="4"/>
             <a:r>
-              <a:rPr lang="en-US" altLang="zh-TW" smtClean="0"/>
+              <a:rPr lang="en-US" altLang="zh-TW"/>
               <a:t>Fifth level</a:t>
             </a:r>
             <a:endParaRPr lang="zh-TW" altLang="en-US"/>
@@ -469,7 +473,7 @@
           <a:p>
             <a:fld id="{0AEF4F30-AB30-4FDA-9026-B75B11F93046}" type="datetimeFigureOut">
               <a:rPr lang="vi-VN" smtClean="0"/>
-              <a:t>07/09/2022</a:t>
+              <a:t>23/02/2026</a:t>
             </a:fld>
             <a:endParaRPr lang="vi-VN"/>
           </a:p>
@@ -568,7 +572,7 @@
           <a:lstStyle/>
           <a:p>
             <a:r>
-              <a:rPr lang="en-US" altLang="zh-TW" smtClean="0"/>
+              <a:rPr lang="en-US" altLang="zh-TW"/>
               <a:t>Click to edit Master title style</a:t>
             </a:r>
             <a:endParaRPr lang="zh-TW" altLang="en-US"/>
@@ -597,35 +601,35 @@
           <a:p>
             <a:pPr lvl="0"/>
             <a:r>
-              <a:rPr lang="en-US" altLang="zh-TW" smtClean="0"/>
+              <a:rPr lang="en-US" altLang="zh-TW"/>
               <a:t>Edit Master text styles</a:t>
             </a:r>
           </a:p>
           <a:p>
             <a:pPr lvl="1"/>
             <a:r>
-              <a:rPr lang="en-US" altLang="zh-TW" smtClean="0"/>
+              <a:rPr lang="en-US" altLang="zh-TW"/>
               <a:t>Second level</a:t>
             </a:r>
           </a:p>
           <a:p>
             <a:pPr lvl="2"/>
             <a:r>
-              <a:rPr lang="en-US" altLang="zh-TW" smtClean="0"/>
+              <a:rPr lang="en-US" altLang="zh-TW"/>
               <a:t>Third level</a:t>
             </a:r>
           </a:p>
           <a:p>
             <a:pPr lvl="3"/>
             <a:r>
-              <a:rPr lang="en-US" altLang="zh-TW" smtClean="0"/>
+              <a:rPr lang="en-US" altLang="zh-TW"/>
               <a:t>Fourth level</a:t>
             </a:r>
           </a:p>
           <a:p>
             <a:pPr lvl="4"/>
             <a:r>
-              <a:rPr lang="en-US" altLang="zh-TW" smtClean="0"/>
+              <a:rPr lang="en-US" altLang="zh-TW"/>
               <a:t>Fifth level</a:t>
             </a:r>
             <a:endParaRPr lang="zh-TW" altLang="en-US"/>
@@ -649,7 +653,7 @@
           <a:p>
             <a:fld id="{0AEF4F30-AB30-4FDA-9026-B75B11F93046}" type="datetimeFigureOut">
               <a:rPr lang="vi-VN" smtClean="0"/>
-              <a:t>07/09/2022</a:t>
+              <a:t>23/02/2026</a:t>
             </a:fld>
             <a:endParaRPr lang="vi-VN"/>
           </a:p>
@@ -743,7 +747,7 @@
           <a:lstStyle/>
           <a:p>
             <a:r>
-              <a:rPr lang="en-US" altLang="zh-TW" smtClean="0"/>
+              <a:rPr lang="en-US" altLang="zh-TW"/>
               <a:t>Click to edit Master title style</a:t>
             </a:r>
             <a:endParaRPr lang="zh-TW" altLang="en-US"/>
@@ -767,35 +771,35 @@
           <a:p>
             <a:pPr lvl="0"/>
             <a:r>
-              <a:rPr lang="en-US" altLang="zh-TW" smtClean="0"/>
+              <a:rPr lang="en-US" altLang="zh-TW"/>
               <a:t>Edit Master text styles</a:t>
             </a:r>
           </a:p>
           <a:p>
             <a:pPr lvl="1"/>
             <a:r>
-              <a:rPr lang="en-US" altLang="zh-TW" smtClean="0"/>
+              <a:rPr lang="en-US" altLang="zh-TW"/>
               <a:t>Second level</a:t>
             </a:r>
           </a:p>
           <a:p>
             <a:pPr lvl="2"/>
             <a:r>
-              <a:rPr lang="en-US" altLang="zh-TW" smtClean="0"/>
+              <a:rPr lang="en-US" altLang="zh-TW"/>
               <a:t>Third level</a:t>
             </a:r>
           </a:p>
           <a:p>
             <a:pPr lvl="3"/>
             <a:r>
-              <a:rPr lang="en-US" altLang="zh-TW" smtClean="0"/>
+              <a:rPr lang="en-US" altLang="zh-TW"/>
               <a:t>Fourth level</a:t>
             </a:r>
           </a:p>
           <a:p>
             <a:pPr lvl="4"/>
             <a:r>
-              <a:rPr lang="en-US" altLang="zh-TW" smtClean="0"/>
+              <a:rPr lang="en-US" altLang="zh-TW"/>
               <a:t>Fifth level</a:t>
             </a:r>
             <a:endParaRPr lang="zh-TW" altLang="en-US"/>
@@ -819,7 +823,7 @@
           <a:p>
             <a:fld id="{0AEF4F30-AB30-4FDA-9026-B75B11F93046}" type="datetimeFigureOut">
               <a:rPr lang="vi-VN" smtClean="0"/>
-              <a:t>07/09/2022</a:t>
+              <a:t>23/02/2026</a:t>
             </a:fld>
             <a:endParaRPr lang="vi-VN"/>
           </a:p>
@@ -922,7 +926,7 @@
           </a:lstStyle>
           <a:p>
             <a:r>
-              <a:rPr lang="en-US" altLang="zh-TW" smtClean="0"/>
+              <a:rPr lang="en-US" altLang="zh-TW"/>
               <a:t>Click to edit Master title style</a:t>
             </a:r>
             <a:endParaRPr lang="zh-TW" altLang="en-US"/>
@@ -1042,7 +1046,7 @@
           <a:p>
             <a:pPr lvl="0"/>
             <a:r>
-              <a:rPr lang="en-US" altLang="zh-TW" smtClean="0"/>
+              <a:rPr lang="en-US" altLang="zh-TW"/>
               <a:t>Edit Master text styles</a:t>
             </a:r>
           </a:p>
@@ -1065,7 +1069,7 @@
           <a:p>
             <a:fld id="{0AEF4F30-AB30-4FDA-9026-B75B11F93046}" type="datetimeFigureOut">
               <a:rPr lang="vi-VN" smtClean="0"/>
-              <a:t>07/09/2022</a:t>
+              <a:t>23/02/2026</a:t>
             </a:fld>
             <a:endParaRPr lang="vi-VN"/>
           </a:p>
@@ -1159,7 +1163,7 @@
           <a:lstStyle/>
           <a:p>
             <a:r>
-              <a:rPr lang="en-US" altLang="zh-TW" smtClean="0"/>
+              <a:rPr lang="en-US" altLang="zh-TW"/>
               <a:t>Click to edit Master title style</a:t>
             </a:r>
             <a:endParaRPr lang="zh-TW" altLang="en-US"/>
@@ -1216,35 +1220,35 @@
           <a:p>
             <a:pPr lvl="0"/>
             <a:r>
-              <a:rPr lang="en-US" altLang="zh-TW" smtClean="0"/>
+              <a:rPr lang="en-US" altLang="zh-TW"/>
               <a:t>Edit Master text styles</a:t>
             </a:r>
           </a:p>
           <a:p>
             <a:pPr lvl="1"/>
             <a:r>
-              <a:rPr lang="en-US" altLang="zh-TW" smtClean="0"/>
+              <a:rPr lang="en-US" altLang="zh-TW"/>
               <a:t>Second level</a:t>
             </a:r>
           </a:p>
           <a:p>
             <a:pPr lvl="2"/>
             <a:r>
-              <a:rPr lang="en-US" altLang="zh-TW" smtClean="0"/>
+              <a:rPr lang="en-US" altLang="zh-TW"/>
               <a:t>Third level</a:t>
             </a:r>
           </a:p>
           <a:p>
             <a:pPr lvl="3"/>
             <a:r>
-              <a:rPr lang="en-US" altLang="zh-TW" smtClean="0"/>
+              <a:rPr lang="en-US" altLang="zh-TW"/>
               <a:t>Fourth level</a:t>
             </a:r>
           </a:p>
           <a:p>
             <a:pPr lvl="4"/>
             <a:r>
-              <a:rPr lang="en-US" altLang="zh-TW" smtClean="0"/>
+              <a:rPr lang="en-US" altLang="zh-TW"/>
               <a:t>Fifth level</a:t>
             </a:r>
             <a:endParaRPr lang="zh-TW" altLang="en-US"/>
@@ -1301,35 +1305,35 @@
           <a:p>
             <a:pPr lvl="0"/>
             <a:r>
-              <a:rPr lang="en-US" altLang="zh-TW" smtClean="0"/>
+              <a:rPr lang="en-US" altLang="zh-TW"/>
               <a:t>Edit Master text styles</a:t>
             </a:r>
           </a:p>
           <a:p>
             <a:pPr lvl="1"/>
             <a:r>
-              <a:rPr lang="en-US" altLang="zh-TW" smtClean="0"/>
+              <a:rPr lang="en-US" altLang="zh-TW"/>
               <a:t>Second level</a:t>
             </a:r>
           </a:p>
           <a:p>
             <a:pPr lvl="2"/>
             <a:r>
-              <a:rPr lang="en-US" altLang="zh-TW" smtClean="0"/>
+              <a:rPr lang="en-US" altLang="zh-TW"/>
               <a:t>Third level</a:t>
             </a:r>
           </a:p>
           <a:p>
             <a:pPr lvl="3"/>
             <a:r>
-              <a:rPr lang="en-US" altLang="zh-TW" smtClean="0"/>
+              <a:rPr lang="en-US" altLang="zh-TW"/>
               <a:t>Fourth level</a:t>
             </a:r>
           </a:p>
           <a:p>
             <a:pPr lvl="4"/>
             <a:r>
-              <a:rPr lang="en-US" altLang="zh-TW" smtClean="0"/>
+              <a:rPr lang="en-US" altLang="zh-TW"/>
               <a:t>Fifth level</a:t>
             </a:r>
             <a:endParaRPr lang="zh-TW" altLang="en-US"/>
@@ -1353,7 +1357,7 @@
           <a:p>
             <a:fld id="{0AEF4F30-AB30-4FDA-9026-B75B11F93046}" type="datetimeFigureOut">
               <a:rPr lang="vi-VN" smtClean="0"/>
-              <a:t>07/09/2022</a:t>
+              <a:t>23/02/2026</a:t>
             </a:fld>
             <a:endParaRPr lang="vi-VN"/>
           </a:p>
@@ -1451,7 +1455,7 @@
           </a:lstStyle>
           <a:p>
             <a:r>
-              <a:rPr lang="en-US" altLang="zh-TW" smtClean="0"/>
+              <a:rPr lang="en-US" altLang="zh-TW"/>
               <a:t>Click to edit Master title style</a:t>
             </a:r>
             <a:endParaRPr lang="zh-TW" altLang="en-US"/>
@@ -1517,7 +1521,7 @@
           <a:p>
             <a:pPr lvl="0"/>
             <a:r>
-              <a:rPr lang="en-US" altLang="zh-TW" smtClean="0"/>
+              <a:rPr lang="en-US" altLang="zh-TW"/>
               <a:t>Edit Master text styles</a:t>
             </a:r>
           </a:p>
@@ -1573,35 +1577,35 @@
           <a:p>
             <a:pPr lvl="0"/>
             <a:r>
-              <a:rPr lang="en-US" altLang="zh-TW" smtClean="0"/>
+              <a:rPr lang="en-US" altLang="zh-TW"/>
               <a:t>Edit Master text styles</a:t>
             </a:r>
           </a:p>
           <a:p>
             <a:pPr lvl="1"/>
             <a:r>
-              <a:rPr lang="en-US" altLang="zh-TW" smtClean="0"/>
+              <a:rPr lang="en-US" altLang="zh-TW"/>
               <a:t>Second level</a:t>
             </a:r>
           </a:p>
           <a:p>
             <a:pPr lvl="2"/>
             <a:r>
-              <a:rPr lang="en-US" altLang="zh-TW" smtClean="0"/>
+              <a:rPr lang="en-US" altLang="zh-TW"/>
               <a:t>Third level</a:t>
             </a:r>
           </a:p>
           <a:p>
             <a:pPr lvl="3"/>
             <a:r>
-              <a:rPr lang="en-US" altLang="zh-TW" smtClean="0"/>
+              <a:rPr lang="en-US" altLang="zh-TW"/>
               <a:t>Fourth level</a:t>
             </a:r>
           </a:p>
           <a:p>
             <a:pPr lvl="4"/>
             <a:r>
-              <a:rPr lang="en-US" altLang="zh-TW" smtClean="0"/>
+              <a:rPr lang="en-US" altLang="zh-TW"/>
               <a:t>Fifth level</a:t>
             </a:r>
             <a:endParaRPr lang="zh-TW" altLang="en-US"/>
@@ -1667,7 +1671,7 @@
           <a:p>
             <a:pPr lvl="0"/>
             <a:r>
-              <a:rPr lang="en-US" altLang="zh-TW" smtClean="0"/>
+              <a:rPr lang="en-US" altLang="zh-TW"/>
               <a:t>Edit Master text styles</a:t>
             </a:r>
           </a:p>
@@ -1723,35 +1727,35 @@
           <a:p>
             <a:pPr lvl="0"/>
             <a:r>
-              <a:rPr lang="en-US" altLang="zh-TW" smtClean="0"/>
+              <a:rPr lang="en-US" altLang="zh-TW"/>
               <a:t>Edit Master text styles</a:t>
             </a:r>
           </a:p>
           <a:p>
             <a:pPr lvl="1"/>
             <a:r>
-              <a:rPr lang="en-US" altLang="zh-TW" smtClean="0"/>
+              <a:rPr lang="en-US" altLang="zh-TW"/>
               <a:t>Second level</a:t>
             </a:r>
           </a:p>
           <a:p>
             <a:pPr lvl="2"/>
             <a:r>
-              <a:rPr lang="en-US" altLang="zh-TW" smtClean="0"/>
+              <a:rPr lang="en-US" altLang="zh-TW"/>
               <a:t>Third level</a:t>
             </a:r>
           </a:p>
           <a:p>
             <a:pPr lvl="3"/>
             <a:r>
-              <a:rPr lang="en-US" altLang="zh-TW" smtClean="0"/>
+              <a:rPr lang="en-US" altLang="zh-TW"/>
               <a:t>Fourth level</a:t>
             </a:r>
           </a:p>
           <a:p>
             <a:pPr lvl="4"/>
             <a:r>
-              <a:rPr lang="en-US" altLang="zh-TW" smtClean="0"/>
+              <a:rPr lang="en-US" altLang="zh-TW"/>
               <a:t>Fifth level</a:t>
             </a:r>
             <a:endParaRPr lang="zh-TW" altLang="en-US"/>
@@ -1775,7 +1779,7 @@
           <a:p>
             <a:fld id="{0AEF4F30-AB30-4FDA-9026-B75B11F93046}" type="datetimeFigureOut">
               <a:rPr lang="vi-VN" smtClean="0"/>
-              <a:t>07/09/2022</a:t>
+              <a:t>23/02/2026</a:t>
             </a:fld>
             <a:endParaRPr lang="vi-VN"/>
           </a:p>
@@ -1869,7 +1873,7 @@
           <a:lstStyle/>
           <a:p>
             <a:r>
-              <a:rPr lang="en-US" altLang="zh-TW" smtClean="0"/>
+              <a:rPr lang="en-US" altLang="zh-TW"/>
               <a:t>Click to edit Master title style</a:t>
             </a:r>
             <a:endParaRPr lang="zh-TW" altLang="en-US"/>
@@ -1893,7 +1897,7 @@
           <a:p>
             <a:fld id="{0AEF4F30-AB30-4FDA-9026-B75B11F93046}" type="datetimeFigureOut">
               <a:rPr lang="vi-VN" smtClean="0"/>
-              <a:t>07/09/2022</a:t>
+              <a:t>23/02/2026</a:t>
             </a:fld>
             <a:endParaRPr lang="vi-VN"/>
           </a:p>
@@ -1988,7 +1992,7 @@
           <a:p>
             <a:fld id="{0AEF4F30-AB30-4FDA-9026-B75B11F93046}" type="datetimeFigureOut">
               <a:rPr lang="vi-VN" smtClean="0"/>
-              <a:t>07/09/2022</a:t>
+              <a:t>23/02/2026</a:t>
             </a:fld>
             <a:endParaRPr lang="vi-VN"/>
           </a:p>
@@ -2091,7 +2095,7 @@
           </a:lstStyle>
           <a:p>
             <a:r>
-              <a:rPr lang="en-US" altLang="zh-TW" smtClean="0"/>
+              <a:rPr lang="en-US" altLang="zh-TW"/>
               <a:t>Click to edit Master title style</a:t>
             </a:r>
             <a:endParaRPr lang="zh-TW" altLang="en-US"/>
@@ -2148,35 +2152,35 @@
           <a:p>
             <a:pPr lvl="0"/>
             <a:r>
-              <a:rPr lang="en-US" altLang="zh-TW" smtClean="0"/>
+              <a:rPr lang="en-US" altLang="zh-TW"/>
               <a:t>Edit Master text styles</a:t>
             </a:r>
           </a:p>
           <a:p>
             <a:pPr lvl="1"/>
             <a:r>
-              <a:rPr lang="en-US" altLang="zh-TW" smtClean="0"/>
+              <a:rPr lang="en-US" altLang="zh-TW"/>
               <a:t>Second level</a:t>
             </a:r>
           </a:p>
           <a:p>
             <a:pPr lvl="2"/>
             <a:r>
-              <a:rPr lang="en-US" altLang="zh-TW" smtClean="0"/>
+              <a:rPr lang="en-US" altLang="zh-TW"/>
               <a:t>Third level</a:t>
             </a:r>
           </a:p>
           <a:p>
             <a:pPr lvl="3"/>
             <a:r>
-              <a:rPr lang="en-US" altLang="zh-TW" smtClean="0"/>
+              <a:rPr lang="en-US" altLang="zh-TW"/>
               <a:t>Fourth level</a:t>
             </a:r>
           </a:p>
           <a:p>
             <a:pPr lvl="4"/>
             <a:r>
-              <a:rPr lang="en-US" altLang="zh-TW" smtClean="0"/>
+              <a:rPr lang="en-US" altLang="zh-TW"/>
               <a:t>Fifth level</a:t>
             </a:r>
             <a:endParaRPr lang="zh-TW" altLang="en-US"/>
@@ -2242,7 +2246,7 @@
           <a:p>
             <a:pPr lvl="0"/>
             <a:r>
-              <a:rPr lang="en-US" altLang="zh-TW" smtClean="0"/>
+              <a:rPr lang="en-US" altLang="zh-TW"/>
               <a:t>Edit Master text styles</a:t>
             </a:r>
           </a:p>
@@ -2265,7 +2269,7 @@
           <a:p>
             <a:fld id="{0AEF4F30-AB30-4FDA-9026-B75B11F93046}" type="datetimeFigureOut">
               <a:rPr lang="vi-VN" smtClean="0"/>
-              <a:t>07/09/2022</a:t>
+              <a:t>23/02/2026</a:t>
             </a:fld>
             <a:endParaRPr lang="vi-VN"/>
           </a:p>
@@ -2368,7 +2372,7 @@
           </a:lstStyle>
           <a:p>
             <a:r>
-              <a:rPr lang="en-US" altLang="zh-TW" smtClean="0"/>
+              <a:rPr lang="en-US" altLang="zh-TW"/>
               <a:t>Click to edit Master title style</a:t>
             </a:r>
             <a:endParaRPr lang="zh-TW" altLang="en-US"/>
@@ -2433,7 +2437,7 @@
           </a:lstStyle>
           <a:p>
             <a:r>
-              <a:rPr lang="en-US" altLang="zh-TW" smtClean="0"/>
+              <a:rPr lang="en-US" altLang="zh-TW"/>
               <a:t>Click icon to add picture</a:t>
             </a:r>
             <a:endParaRPr lang="zh-TW" altLang="en-US"/>
@@ -2499,7 +2503,7 @@
           <a:p>
             <a:pPr lvl="0"/>
             <a:r>
-              <a:rPr lang="en-US" altLang="zh-TW" smtClean="0"/>
+              <a:rPr lang="en-US" altLang="zh-TW"/>
               <a:t>Edit Master text styles</a:t>
             </a:r>
           </a:p>
@@ -2522,7 +2526,7 @@
           <a:p>
             <a:fld id="{0AEF4F30-AB30-4FDA-9026-B75B11F93046}" type="datetimeFigureOut">
               <a:rPr lang="vi-VN" smtClean="0"/>
-              <a:t>07/09/2022</a:t>
+              <a:t>23/02/2026</a:t>
             </a:fld>
             <a:endParaRPr lang="vi-VN"/>
           </a:p>
@@ -2636,10 +2640,9 @@
           <a:lstStyle/>
           <a:p>
             <a:r>
-              <a:rPr lang="zh-TW" altLang="en-US" smtClean="0"/>
+              <a:rPr lang="zh-TW" altLang="en-US"/>
               <a:t>按一下以編輯母片標題樣式</a:t>
             </a:r>
-            <a:endParaRPr lang="zh-TW" altLang="en-US"/>
           </a:p>
         </p:txBody>
       </p:sp>
@@ -2670,38 +2673,37 @@
           <a:p>
             <a:pPr lvl="0"/>
             <a:r>
-              <a:rPr lang="zh-TW" altLang="en-US" smtClean="0"/>
+              <a:rPr lang="zh-TW" altLang="en-US"/>
               <a:t>按一下以編輯母片文字樣式</a:t>
             </a:r>
           </a:p>
           <a:p>
             <a:pPr lvl="1"/>
             <a:r>
-              <a:rPr lang="zh-TW" altLang="en-US" smtClean="0"/>
+              <a:rPr lang="zh-TW" altLang="en-US"/>
               <a:t>第二層</a:t>
             </a:r>
           </a:p>
           <a:p>
             <a:pPr lvl="2"/>
             <a:r>
-              <a:rPr lang="zh-TW" altLang="en-US" smtClean="0"/>
+              <a:rPr lang="zh-TW" altLang="en-US"/>
               <a:t>第三層</a:t>
             </a:r>
           </a:p>
           <a:p>
             <a:pPr lvl="3"/>
             <a:r>
-              <a:rPr lang="zh-TW" altLang="en-US" smtClean="0"/>
+              <a:rPr lang="zh-TW" altLang="en-US"/>
               <a:t>第四層</a:t>
             </a:r>
           </a:p>
           <a:p>
             <a:pPr lvl="4"/>
             <a:r>
-              <a:rPr lang="zh-TW" altLang="en-US" smtClean="0"/>
+              <a:rPr lang="zh-TW" altLang="en-US"/>
               <a:t>第五層</a:t>
             </a:r>
-            <a:endParaRPr lang="zh-TW" altLang="en-US"/>
           </a:p>
         </p:txBody>
       </p:sp>
@@ -2740,7 +2742,7 @@
           <a:p>
             <a:fld id="{0AEF4F30-AB30-4FDA-9026-B75B11F93046}" type="datetimeFigureOut">
               <a:rPr lang="vi-VN" smtClean="0"/>
-              <a:t>07/09/2022</a:t>
+              <a:t>23/02/2026</a:t>
             </a:fld>
             <a:endParaRPr lang="vi-VN"/>
           </a:p>
@@ -3138,7 +3140,7 @@
           <a:lstStyle/>
           <a:p>
             <a:r>
-              <a:rPr lang="zh-CN" altLang="en-US" sz="7200" b="1" i="1" dirty="0" smtClean="0">
+              <a:rPr lang="zh-CN" altLang="en-US" sz="7200" b="1" i="1" dirty="0">
                 <a:solidFill>
                   <a:srgbClr val="660033"/>
                 </a:solidFill>
@@ -3152,24 +3154,7 @@
                 <a:latin typeface="微軟正黑體" pitchFamily="34" charset="-120"/>
                 <a:ea typeface="微軟正黑體" pitchFamily="34" charset="-120"/>
               </a:rPr>
-              <a:t>耶</a:t>
-            </a:r>
-            <a:r>
-              <a:rPr lang="zh-CN" altLang="en-US" sz="7200" b="1" i="1" dirty="0">
-                <a:solidFill>
-                  <a:srgbClr val="660033"/>
-                </a:solidFill>
-                <a:effectLst>
-                  <a:outerShdw blurRad="38100" dist="38100" dir="2700000" algn="tl">
-                    <a:srgbClr val="000000">
-                      <a:alpha val="43137"/>
-                    </a:srgbClr>
-                  </a:outerShdw>
-                </a:effectLst>
-                <a:latin typeface="微軟正黑體" pitchFamily="34" charset="-120"/>
-                <a:ea typeface="微軟正黑體" pitchFamily="34" charset="-120"/>
-              </a:rPr>
-              <a:t>和華祝福滿滿</a:t>
+              <a:t>耶和華祝福滿滿</a:t>
             </a:r>
             <a:endParaRPr lang="zh-TW" altLang="en-US" sz="7200" b="1" i="1" dirty="0">
               <a:solidFill>
@@ -3227,7 +3212,7 @@
           </a:lstStyle>
           <a:p>
             <a:r>
-              <a:rPr lang="fr-FR" sz="4800" b="1" i="1" dirty="0" err="1" smtClean="0">
+              <a:rPr lang="vi-VN" sz="4800" b="1" i="1" dirty="0">
                 <a:solidFill>
                   <a:srgbClr val="000066"/>
                 </a:solidFill>
@@ -3242,187 +3227,7 @@
                 <a:ea typeface="微軟正黑體" pitchFamily="34" charset="-120"/>
                 <a:cs typeface="Calibri" panose="020F0502020204030204" pitchFamily="34" charset="0"/>
               </a:rPr>
-              <a:t>Đức</a:t>
-            </a:r>
-            <a:r>
-              <a:rPr lang="fr-FR" sz="4800" b="1" i="1" dirty="0" smtClean="0">
-                <a:solidFill>
-                  <a:srgbClr val="000066"/>
-                </a:solidFill>
-                <a:effectLst>
-                  <a:outerShdw blurRad="38100" dist="38100" dir="2700000" algn="tl">
-                    <a:srgbClr val="000000">
-                      <a:alpha val="43137"/>
-                    </a:srgbClr>
-                  </a:outerShdw>
-                </a:effectLst>
-                <a:latin typeface="Calibri" panose="020F0502020204030204" pitchFamily="34" charset="0"/>
-                <a:ea typeface="微軟正黑體" pitchFamily="34" charset="-120"/>
-                <a:cs typeface="Calibri" panose="020F0502020204030204" pitchFamily="34" charset="0"/>
-              </a:rPr>
-              <a:t> </a:t>
-            </a:r>
-            <a:r>
-              <a:rPr lang="fr-FR" sz="4800" b="1" i="1" dirty="0" err="1">
-                <a:solidFill>
-                  <a:srgbClr val="000066"/>
-                </a:solidFill>
-                <a:effectLst>
-                  <a:outerShdw blurRad="38100" dist="38100" dir="2700000" algn="tl">
-                    <a:srgbClr val="000000">
-                      <a:alpha val="43137"/>
-                    </a:srgbClr>
-                  </a:outerShdw>
-                </a:effectLst>
-                <a:latin typeface="Calibri" panose="020F0502020204030204" pitchFamily="34" charset="0"/>
-                <a:ea typeface="微軟正黑體" pitchFamily="34" charset="-120"/>
-                <a:cs typeface="Calibri" panose="020F0502020204030204" pitchFamily="34" charset="0"/>
-              </a:rPr>
-              <a:t>Giê</a:t>
-            </a:r>
-            <a:r>
-              <a:rPr lang="fr-FR" sz="4800" b="1" i="1" dirty="0">
-                <a:solidFill>
-                  <a:srgbClr val="000066"/>
-                </a:solidFill>
-                <a:effectLst>
-                  <a:outerShdw blurRad="38100" dist="38100" dir="2700000" algn="tl">
-                    <a:srgbClr val="000000">
-                      <a:alpha val="43137"/>
-                    </a:srgbClr>
-                  </a:outerShdw>
-                </a:effectLst>
-                <a:latin typeface="Calibri" panose="020F0502020204030204" pitchFamily="34" charset="0"/>
-                <a:ea typeface="微軟正黑體" pitchFamily="34" charset="-120"/>
-                <a:cs typeface="Calibri" panose="020F0502020204030204" pitchFamily="34" charset="0"/>
-              </a:rPr>
-              <a:t>-</a:t>
-            </a:r>
-            <a:r>
-              <a:rPr lang="fr-FR" sz="4800" b="1" i="1" dirty="0" err="1">
-                <a:solidFill>
-                  <a:srgbClr val="000066"/>
-                </a:solidFill>
-                <a:effectLst>
-                  <a:outerShdw blurRad="38100" dist="38100" dir="2700000" algn="tl">
-                    <a:srgbClr val="000000">
-                      <a:alpha val="43137"/>
-                    </a:srgbClr>
-                  </a:outerShdw>
-                </a:effectLst>
-                <a:latin typeface="Calibri" panose="020F0502020204030204" pitchFamily="34" charset="0"/>
-                <a:ea typeface="微軟正黑體" pitchFamily="34" charset="-120"/>
-                <a:cs typeface="Calibri" panose="020F0502020204030204" pitchFamily="34" charset="0"/>
-              </a:rPr>
-              <a:t>hô</a:t>
-            </a:r>
-            <a:r>
-              <a:rPr lang="fr-FR" sz="4800" b="1" i="1" dirty="0">
-                <a:solidFill>
-                  <a:srgbClr val="000066"/>
-                </a:solidFill>
-                <a:effectLst>
-                  <a:outerShdw blurRad="38100" dist="38100" dir="2700000" algn="tl">
-                    <a:srgbClr val="000000">
-                      <a:alpha val="43137"/>
-                    </a:srgbClr>
-                  </a:outerShdw>
-                </a:effectLst>
-                <a:latin typeface="Calibri" panose="020F0502020204030204" pitchFamily="34" charset="0"/>
-                <a:ea typeface="微軟正黑體" pitchFamily="34" charset="-120"/>
-                <a:cs typeface="Calibri" panose="020F0502020204030204" pitchFamily="34" charset="0"/>
-              </a:rPr>
-              <a:t>-va ban </a:t>
-            </a:r>
-            <a:r>
-              <a:rPr lang="fr-FR" sz="4800" b="1" i="1" dirty="0" err="1">
-                <a:solidFill>
-                  <a:srgbClr val="000066"/>
-                </a:solidFill>
-                <a:effectLst>
-                  <a:outerShdw blurRad="38100" dist="38100" dir="2700000" algn="tl">
-                    <a:srgbClr val="000000">
-                      <a:alpha val="43137"/>
-                    </a:srgbClr>
-                  </a:outerShdw>
-                </a:effectLst>
-                <a:latin typeface="Calibri" panose="020F0502020204030204" pitchFamily="34" charset="0"/>
-                <a:ea typeface="微軟正黑體" pitchFamily="34" charset="-120"/>
-                <a:cs typeface="Calibri" panose="020F0502020204030204" pitchFamily="34" charset="0"/>
-              </a:rPr>
-              <a:t>phước</a:t>
-            </a:r>
-            <a:r>
-              <a:rPr lang="fr-FR" sz="4800" b="1" i="1" dirty="0">
-                <a:solidFill>
-                  <a:srgbClr val="000066"/>
-                </a:solidFill>
-                <a:effectLst>
-                  <a:outerShdw blurRad="38100" dist="38100" dir="2700000" algn="tl">
-                    <a:srgbClr val="000000">
-                      <a:alpha val="43137"/>
-                    </a:srgbClr>
-                  </a:outerShdw>
-                </a:effectLst>
-                <a:latin typeface="Calibri" panose="020F0502020204030204" pitchFamily="34" charset="0"/>
-                <a:ea typeface="微軟正黑體" pitchFamily="34" charset="-120"/>
-                <a:cs typeface="Calibri" panose="020F0502020204030204" pitchFamily="34" charset="0"/>
-              </a:rPr>
-              <a:t> </a:t>
-            </a:r>
-            <a:r>
-              <a:rPr lang="fr-FR" sz="4800" b="1" i="1" dirty="0" err="1">
-                <a:solidFill>
-                  <a:srgbClr val="000066"/>
-                </a:solidFill>
-                <a:effectLst>
-                  <a:outerShdw blurRad="38100" dist="38100" dir="2700000" algn="tl">
-                    <a:srgbClr val="000000">
-                      <a:alpha val="43137"/>
-                    </a:srgbClr>
-                  </a:outerShdw>
-                </a:effectLst>
-                <a:latin typeface="Calibri" panose="020F0502020204030204" pitchFamily="34" charset="0"/>
-                <a:ea typeface="微軟正黑體" pitchFamily="34" charset="-120"/>
-                <a:cs typeface="Calibri" panose="020F0502020204030204" pitchFamily="34" charset="0"/>
-              </a:rPr>
-              <a:t>dư</a:t>
-            </a:r>
-            <a:r>
-              <a:rPr lang="fr-FR" sz="4800" b="1" i="1" dirty="0">
-                <a:solidFill>
-                  <a:srgbClr val="000066"/>
-                </a:solidFill>
-                <a:effectLst>
-                  <a:outerShdw blurRad="38100" dist="38100" dir="2700000" algn="tl">
-                    <a:srgbClr val="000000">
-                      <a:alpha val="43137"/>
-                    </a:srgbClr>
-                  </a:outerShdw>
-                </a:effectLst>
-                <a:latin typeface="Calibri" panose="020F0502020204030204" pitchFamily="34" charset="0"/>
-                <a:ea typeface="微軟正黑體" pitchFamily="34" charset="-120"/>
-                <a:cs typeface="Calibri" panose="020F0502020204030204" pitchFamily="34" charset="0"/>
-              </a:rPr>
-              <a:t> </a:t>
-            </a:r>
-            <a:r>
-              <a:rPr lang="fr-FR" sz="4800" b="1" i="1" dirty="0" err="1">
-                <a:solidFill>
-                  <a:srgbClr val="000066"/>
-                </a:solidFill>
-                <a:effectLst>
-                  <a:outerShdw blurRad="38100" dist="38100" dir="2700000" algn="tl">
-                    <a:srgbClr val="000000">
-                      <a:alpha val="43137"/>
-                    </a:srgbClr>
-                  </a:outerShdw>
-                </a:effectLst>
-                <a:latin typeface="Calibri" panose="020F0502020204030204" pitchFamily="34" charset="0"/>
-                <a:ea typeface="微軟正黑體" pitchFamily="34" charset="-120"/>
-                <a:cs typeface="Calibri" panose="020F0502020204030204" pitchFamily="34" charset="0"/>
-              </a:rPr>
-              <a:t>dật</a:t>
+              <a:t>Chúa ban phước lành tràn đầy</a:t>
             </a:r>
             <a:endParaRPr lang="zh-TW" altLang="en-US" sz="4800" b="1" i="1" dirty="0">
               <a:solidFill>
@@ -3505,7 +3310,7 @@
                 <a:latin typeface="微軟正黑體" pitchFamily="34" charset="-120"/>
                 <a:ea typeface="微軟正黑體" pitchFamily="34" charset="-120"/>
               </a:rPr>
-              <a:t>我要舉手敬拜祂</a:t>
+              <a:t>唱出歡喜的歌聲</a:t>
             </a:r>
             <a:endParaRPr lang="en-US" altLang="zh-CN" sz="6400" b="1" dirty="0">
               <a:solidFill>
@@ -3680,17 +3485,36 @@
               <a:buNone/>
             </a:pPr>
             <a:r>
-              <a:rPr lang="vi-VN" sz="4000" b="1" dirty="0">
+              <a:rPr lang="en-US" sz="4000" b="1" dirty="0">
                 <a:solidFill>
                   <a:srgbClr val="000066"/>
                 </a:solidFill>
-                <a:effectLst/>
                 <a:latin typeface="Calibri" panose="020F0502020204030204" pitchFamily="34" charset="0"/>
                 <a:ea typeface="微軟正黑體" pitchFamily="34" charset="-120"/>
                 <a:cs typeface="Calibri" panose="020F0502020204030204" pitchFamily="34" charset="0"/>
               </a:rPr>
-              <a:t>Tôi phải giờ tay lên để thờ phượng Ngài</a:t>
-            </a:r>
+              <a:t>C</a:t>
+            </a:r>
+            <a:r>
+              <a:rPr lang="vi-VN" sz="4000" b="1" dirty="0">
+                <a:solidFill>
+                  <a:srgbClr val="000066"/>
+                </a:solidFill>
+                <a:latin typeface="Calibri" panose="020F0502020204030204" pitchFamily="34" charset="0"/>
+                <a:ea typeface="微軟正黑體" pitchFamily="34" charset="-120"/>
+                <a:cs typeface="Calibri" panose="020F0502020204030204" pitchFamily="34" charset="0"/>
+              </a:rPr>
+              <a:t>ất tiếng hát mừng vui</a:t>
+            </a:r>
+            <a:endParaRPr lang="vi-VN" sz="4000" b="1" dirty="0">
+              <a:solidFill>
+                <a:srgbClr val="000066"/>
+              </a:solidFill>
+              <a:effectLst/>
+              <a:latin typeface="Calibri" panose="020F0502020204030204" pitchFamily="34" charset="0"/>
+              <a:ea typeface="微軟正黑體" pitchFamily="34" charset="-120"/>
+              <a:cs typeface="Calibri" panose="020F0502020204030204" pitchFamily="34" charset="0"/>
+            </a:endParaRPr>
           </a:p>
         </p:txBody>
       </p:sp>
@@ -3728,34 +3552,24 @@
               <a:t>( </a:t>
             </a:r>
             <a:r>
-              <a:rPr lang="zh-CN" altLang="en-US" sz="4267" b="1" dirty="0" smtClean="0">
+              <a:rPr lang="zh-CN" altLang="en-US" sz="4267" b="1" dirty="0">
                 <a:solidFill>
                   <a:srgbClr val="660033"/>
                 </a:solidFill>
                 <a:latin typeface="Microsoft JhengHei" panose="020B0604030504040204" pitchFamily="34" charset="-120"/>
                 <a:ea typeface="Microsoft JhengHei" panose="020B0604030504040204" pitchFamily="34" charset="-120"/>
               </a:rPr>
-              <a:t>副</a:t>
-            </a:r>
-            <a:r>
-              <a:rPr lang="en-US" sz="4267" b="1" dirty="0" smtClean="0">
+              <a:t>副歌</a:t>
+            </a:r>
+            <a:r>
+              <a:rPr lang="en-US" sz="4267" b="1" dirty="0">
                 <a:solidFill>
                   <a:srgbClr val="660033"/>
                 </a:solidFill>
                 <a:latin typeface="Microsoft JhengHei" panose="020B0604030504040204" pitchFamily="34" charset="-120"/>
                 <a:ea typeface="Microsoft JhengHei" panose="020B0604030504040204" pitchFamily="34" charset="-120"/>
               </a:rPr>
-              <a:t> </a:t>
-            </a:r>
-            <a:r>
-              <a:rPr lang="en-US" sz="4267" b="1" dirty="0">
-                <a:solidFill>
-                  <a:srgbClr val="660033"/>
-                </a:solidFill>
-                <a:latin typeface="Microsoft JhengHei" panose="020B0604030504040204" pitchFamily="34" charset="-120"/>
-                <a:ea typeface="Microsoft JhengHei" panose="020B0604030504040204" pitchFamily="34" charset="-120"/>
-              </a:rPr>
-              <a:t>)</a:t>
+              <a:t> )</a:t>
             </a:r>
             <a:endParaRPr lang="vi-VN" sz="4267" b="1" dirty="0">
               <a:solidFill>
@@ -3769,7 +3583,7 @@
     </p:spTree>
     <p:extLst>
       <p:ext uri="{BB962C8B-B14F-4D97-AF65-F5344CB8AC3E}">
-        <p14:creationId xmlns:p14="http://schemas.microsoft.com/office/powerpoint/2010/main" val="725653654"/>
+        <p14:creationId xmlns:p14="http://schemas.microsoft.com/office/powerpoint/2010/main" val="597390066"/>
       </p:ext>
     </p:extLst>
   </p:cSld>
@@ -3829,9 +3643,9 @@
                 <a:latin typeface="微軟正黑體" pitchFamily="34" charset="-120"/>
                 <a:ea typeface="微軟正黑體" pitchFamily="34" charset="-120"/>
               </a:rPr>
-              <a:t>唱出歡喜的歌聲</a:t>
-            </a:r>
-            <a:endParaRPr lang="en-US" altLang="zh-CN" sz="6400" b="1" dirty="0">
+              <a:t>讚美稱頌祂名永不息</a:t>
+            </a:r>
+            <a:endParaRPr lang="en-US" altLang="zh-TW" sz="6400" b="1" dirty="0">
               <a:solidFill>
                 <a:srgbClr val="660033"/>
               </a:solidFill>
@@ -4008,24 +3822,11 @@
                 <a:solidFill>
                   <a:srgbClr val="000066"/>
                 </a:solidFill>
-                <a:effectLst/>
                 <a:latin typeface="Calibri" panose="020F0502020204030204" pitchFamily="34" charset="0"/>
                 <a:ea typeface="微軟正黑體" pitchFamily="34" charset="-120"/>
                 <a:cs typeface="Calibri" panose="020F0502020204030204" pitchFamily="34" charset="0"/>
               </a:rPr>
-              <a:t>Ca vang Chúa bằng giọng hát vui </a:t>
-            </a:r>
-            <a:r>
-              <a:rPr lang="vi-VN" sz="4000" b="1" dirty="0">
-                <a:solidFill>
-                  <a:srgbClr val="000066"/>
-                </a:solidFill>
-                <a:effectLst/>
-                <a:latin typeface="Calibri" panose="020F0502020204030204" pitchFamily="34" charset="0"/>
-                <a:ea typeface="微軟正黑體" pitchFamily="34" charset="-120"/>
-                <a:cs typeface="Calibri" panose="020F0502020204030204" pitchFamily="34" charset="0"/>
-              </a:rPr>
-              <a:t>mừng</a:t>
+              <a:t>Ngợi khen danh Ngài mãi không thôi</a:t>
             </a:r>
             <a:endParaRPr lang="vi-VN" sz="4000" b="1" dirty="0">
               <a:solidFill>
@@ -4073,358 +3874,24 @@
               <a:t>( </a:t>
             </a:r>
             <a:r>
-              <a:rPr lang="zh-CN" altLang="en-US" sz="4267" b="1" dirty="0" smtClean="0">
+              <a:rPr lang="zh-CN" altLang="en-US" sz="4267" b="1" dirty="0">
                 <a:solidFill>
                   <a:srgbClr val="660033"/>
                 </a:solidFill>
                 <a:latin typeface="Microsoft JhengHei" panose="020B0604030504040204" pitchFamily="34" charset="-120"/>
                 <a:ea typeface="Microsoft JhengHei" panose="020B0604030504040204" pitchFamily="34" charset="-120"/>
               </a:rPr>
-              <a:t>副</a:t>
-            </a:r>
-            <a:r>
-              <a:rPr lang="en-US" sz="4267" b="1" dirty="0" smtClean="0">
+              <a:t>副歌</a:t>
+            </a:r>
+            <a:r>
+              <a:rPr lang="en-US" sz="4267" b="1" dirty="0">
                 <a:solidFill>
                   <a:srgbClr val="660033"/>
                 </a:solidFill>
                 <a:latin typeface="Microsoft JhengHei" panose="020B0604030504040204" pitchFamily="34" charset="-120"/>
                 <a:ea typeface="Microsoft JhengHei" panose="020B0604030504040204" pitchFamily="34" charset="-120"/>
               </a:rPr>
-              <a:t> </a:t>
-            </a:r>
-            <a:r>
-              <a:rPr lang="en-US" sz="4267" b="1" dirty="0">
-                <a:solidFill>
-                  <a:srgbClr val="660033"/>
-                </a:solidFill>
-                <a:latin typeface="Microsoft JhengHei" panose="020B0604030504040204" pitchFamily="34" charset="-120"/>
-                <a:ea typeface="Microsoft JhengHei" panose="020B0604030504040204" pitchFamily="34" charset="-120"/>
-              </a:rPr>
-              <a:t>)</a:t>
-            </a:r>
-            <a:endParaRPr lang="vi-VN" sz="4267" b="1" dirty="0">
-              <a:solidFill>
-                <a:srgbClr val="660033"/>
-              </a:solidFill>
-              <a:ea typeface="Microsoft JhengHei" panose="020B0604030504040204" pitchFamily="34" charset="-120"/>
-            </a:endParaRPr>
-          </a:p>
-        </p:txBody>
-      </p:sp>
-    </p:spTree>
-    <p:extLst>
-      <p:ext uri="{BB962C8B-B14F-4D97-AF65-F5344CB8AC3E}">
-        <p14:creationId xmlns:p14="http://schemas.microsoft.com/office/powerpoint/2010/main" val="597390066"/>
-      </p:ext>
-    </p:extLst>
-  </p:cSld>
-  <p:clrMapOvr>
-    <a:masterClrMapping/>
-  </p:clrMapOvr>
-</p:sld>
-</file>
-
-<file path=ppt/slides/slide12.xml><?xml version="1.0" encoding="utf-8"?>
-<p:sld xmlns:a="http://schemas.openxmlformats.org/drawingml/2006/main" xmlns:r="http://schemas.openxmlformats.org/officeDocument/2006/relationships" xmlns:p="http://schemas.openxmlformats.org/presentationml/2006/main">
-  <p:cSld>
-    <p:spTree>
-      <p:nvGrpSpPr>
-        <p:cNvPr id="1" name=""/>
-        <p:cNvGrpSpPr/>
-        <p:nvPr/>
-      </p:nvGrpSpPr>
-      <p:grpSpPr>
-        <a:xfrm>
-          <a:off x="0" y="0"/>
-          <a:ext cx="0" cy="0"/>
-          <a:chOff x="0" y="0"/>
-          <a:chExt cx="0" cy="0"/>
-        </a:xfrm>
-      </p:grpSpPr>
-      <p:sp>
-        <p:nvSpPr>
-          <p:cNvPr id="5" name="內容版面配置區 4"/>
-          <p:cNvSpPr>
-            <a:spLocks noGrp="1"/>
-          </p:cNvSpPr>
-          <p:nvPr>
-            <p:ph idx="1"/>
-          </p:nvPr>
-        </p:nvSpPr>
-        <p:spPr>
-          <a:xfrm>
-            <a:off x="0" y="2167981"/>
-            <a:ext cx="12192000" cy="1318225"/>
-          </a:xfrm>
-        </p:spPr>
-        <p:txBody>
-          <a:bodyPr anchor="ctr">
-            <a:normAutofit/>
-          </a:bodyPr>
-          <a:lstStyle/>
-          <a:p>
-            <a:pPr marL="0" indent="0" algn="ctr">
-              <a:buNone/>
-            </a:pPr>
-            <a:r>
-              <a:rPr lang="zh-CN" altLang="en-US" sz="6400" b="1" dirty="0">
-                <a:solidFill>
-                  <a:srgbClr val="660033"/>
-                </a:solidFill>
-                <a:latin typeface="微軟正黑體" pitchFamily="34" charset="-120"/>
-                <a:ea typeface="微軟正黑體" pitchFamily="34" charset="-120"/>
-              </a:rPr>
-              <a:t>讚美稱頌祂名永不息</a:t>
-            </a:r>
-            <a:endParaRPr lang="en-US" altLang="zh-TW" sz="6400" b="1" dirty="0">
-              <a:solidFill>
-                <a:srgbClr val="660033"/>
-              </a:solidFill>
-              <a:latin typeface="微軟正黑體" pitchFamily="34" charset="-120"/>
-              <a:ea typeface="微軟正黑體" pitchFamily="34" charset="-120"/>
-            </a:endParaRPr>
-          </a:p>
-        </p:txBody>
-      </p:sp>
-      <p:sp>
-        <p:nvSpPr>
-          <p:cNvPr id="3" name="內容版面配置區 4"/>
-          <p:cNvSpPr txBox="1">
-            <a:spLocks/>
-          </p:cNvSpPr>
-          <p:nvPr/>
-        </p:nvSpPr>
-        <p:spPr>
-          <a:xfrm>
-            <a:off x="0" y="3117530"/>
-            <a:ext cx="12192000" cy="1318225"/>
-          </a:xfrm>
-          <a:prstGeom prst="rect">
-            <a:avLst/>
-          </a:prstGeom>
-        </p:spPr>
-        <p:txBody>
-          <a:bodyPr vert="horz" lIns="91440" tIns="45720" rIns="91440" bIns="45720" rtlCol="0" anchor="ctr">
-            <a:normAutofit/>
-          </a:bodyPr>
-          <a:lstStyle>
-            <a:lvl1pPr marL="457189" indent="-457189" algn="l" defTabSz="1219170" rtl="0" eaLnBrk="1" latinLnBrk="0" hangingPunct="1">
-              <a:spcBef>
-                <a:spcPct val="20000"/>
-              </a:spcBef>
-              <a:buFont typeface="Arial" pitchFamily="34" charset="0"/>
-              <a:buChar char="•"/>
-              <a:defRPr sz="4267" kern="1200">
-                <a:solidFill>
-                  <a:schemeClr val="tx1"/>
-                </a:solidFill>
-                <a:latin typeface="+mn-lt"/>
-                <a:ea typeface="+mn-ea"/>
-                <a:cs typeface="+mn-cs"/>
-              </a:defRPr>
-            </a:lvl1pPr>
-            <a:lvl2pPr marL="990575" indent="-380990" algn="l" defTabSz="1219170" rtl="0" eaLnBrk="1" latinLnBrk="0" hangingPunct="1">
-              <a:spcBef>
-                <a:spcPct val="20000"/>
-              </a:spcBef>
-              <a:buFont typeface="Arial" pitchFamily="34" charset="0"/>
-              <a:buChar char="–"/>
-              <a:defRPr sz="3733" kern="1200">
-                <a:solidFill>
-                  <a:schemeClr val="tx1"/>
-                </a:solidFill>
-                <a:latin typeface="+mn-lt"/>
-                <a:ea typeface="+mn-ea"/>
-                <a:cs typeface="+mn-cs"/>
-              </a:defRPr>
-            </a:lvl2pPr>
-            <a:lvl3pPr marL="1523962" indent="-304792" algn="l" defTabSz="1219170" rtl="0" eaLnBrk="1" latinLnBrk="0" hangingPunct="1">
-              <a:spcBef>
-                <a:spcPct val="20000"/>
-              </a:spcBef>
-              <a:buFont typeface="Arial" pitchFamily="34" charset="0"/>
-              <a:buChar char="•"/>
-              <a:defRPr sz="3200" kern="1200">
-                <a:solidFill>
-                  <a:schemeClr val="tx1"/>
-                </a:solidFill>
-                <a:latin typeface="+mn-lt"/>
-                <a:ea typeface="+mn-ea"/>
-                <a:cs typeface="+mn-cs"/>
-              </a:defRPr>
-            </a:lvl3pPr>
-            <a:lvl4pPr marL="2133547" indent="-304792" algn="l" defTabSz="1219170" rtl="0" eaLnBrk="1" latinLnBrk="0" hangingPunct="1">
-              <a:spcBef>
-                <a:spcPct val="20000"/>
-              </a:spcBef>
-              <a:buFont typeface="Arial" pitchFamily="34" charset="0"/>
-              <a:buChar char="–"/>
-              <a:defRPr sz="2667" kern="1200">
-                <a:solidFill>
-                  <a:schemeClr val="tx1"/>
-                </a:solidFill>
-                <a:latin typeface="+mn-lt"/>
-                <a:ea typeface="+mn-ea"/>
-                <a:cs typeface="+mn-cs"/>
-              </a:defRPr>
-            </a:lvl4pPr>
-            <a:lvl5pPr marL="2743131" indent="-304792" algn="l" defTabSz="1219170" rtl="0" eaLnBrk="1" latinLnBrk="0" hangingPunct="1">
-              <a:spcBef>
-                <a:spcPct val="20000"/>
-              </a:spcBef>
-              <a:buFont typeface="Arial" pitchFamily="34" charset="0"/>
-              <a:buChar char="»"/>
-              <a:defRPr sz="2667" kern="1200">
-                <a:solidFill>
-                  <a:schemeClr val="tx1"/>
-                </a:solidFill>
-                <a:latin typeface="+mn-lt"/>
-                <a:ea typeface="+mn-ea"/>
-                <a:cs typeface="+mn-cs"/>
-              </a:defRPr>
-            </a:lvl5pPr>
-            <a:lvl6pPr marL="3352716" indent="-304792" algn="l" defTabSz="1219170" rtl="0" eaLnBrk="1" latinLnBrk="0" hangingPunct="1">
-              <a:spcBef>
-                <a:spcPct val="20000"/>
-              </a:spcBef>
-              <a:buFont typeface="Arial" pitchFamily="34" charset="0"/>
-              <a:buChar char="•"/>
-              <a:defRPr sz="2667" kern="1200">
-                <a:solidFill>
-                  <a:schemeClr val="tx1"/>
-                </a:solidFill>
-                <a:latin typeface="+mn-lt"/>
-                <a:ea typeface="+mn-ea"/>
-                <a:cs typeface="+mn-cs"/>
-              </a:defRPr>
-            </a:lvl6pPr>
-            <a:lvl7pPr marL="3962301" indent="-304792" algn="l" defTabSz="1219170" rtl="0" eaLnBrk="1" latinLnBrk="0" hangingPunct="1">
-              <a:spcBef>
-                <a:spcPct val="20000"/>
-              </a:spcBef>
-              <a:buFont typeface="Arial" pitchFamily="34" charset="0"/>
-              <a:buChar char="•"/>
-              <a:defRPr sz="2667" kern="1200">
-                <a:solidFill>
-                  <a:schemeClr val="tx1"/>
-                </a:solidFill>
-                <a:latin typeface="+mn-lt"/>
-                <a:ea typeface="+mn-ea"/>
-                <a:cs typeface="+mn-cs"/>
-              </a:defRPr>
-            </a:lvl7pPr>
-            <a:lvl8pPr marL="4571886" indent="-304792" algn="l" defTabSz="1219170" rtl="0" eaLnBrk="1" latinLnBrk="0" hangingPunct="1">
-              <a:spcBef>
-                <a:spcPct val="20000"/>
-              </a:spcBef>
-              <a:buFont typeface="Arial" pitchFamily="34" charset="0"/>
-              <a:buChar char="•"/>
-              <a:defRPr sz="2667" kern="1200">
-                <a:solidFill>
-                  <a:schemeClr val="tx1"/>
-                </a:solidFill>
-                <a:latin typeface="+mn-lt"/>
-                <a:ea typeface="+mn-ea"/>
-                <a:cs typeface="+mn-cs"/>
-              </a:defRPr>
-            </a:lvl8pPr>
-            <a:lvl9pPr marL="5181470" indent="-304792" algn="l" defTabSz="1219170" rtl="0" eaLnBrk="1" latinLnBrk="0" hangingPunct="1">
-              <a:spcBef>
-                <a:spcPct val="20000"/>
-              </a:spcBef>
-              <a:buFont typeface="Arial" pitchFamily="34" charset="0"/>
-              <a:buChar char="•"/>
-              <a:defRPr sz="2667" kern="1200">
-                <a:solidFill>
-                  <a:schemeClr val="tx1"/>
-                </a:solidFill>
-                <a:latin typeface="+mn-lt"/>
-                <a:ea typeface="+mn-ea"/>
-                <a:cs typeface="+mn-cs"/>
-              </a:defRPr>
-            </a:lvl9pPr>
-          </a:lstStyle>
-          <a:p>
-            <a:pPr marL="0" indent="0" algn="ctr">
-              <a:buNone/>
-            </a:pPr>
-            <a:r>
-              <a:rPr lang="vi-VN" sz="4000" b="1" dirty="0">
-                <a:solidFill>
-                  <a:srgbClr val="000066"/>
-                </a:solidFill>
-                <a:effectLst/>
-                <a:latin typeface="Calibri" panose="020F0502020204030204" pitchFamily="34" charset="0"/>
-                <a:ea typeface="微軟正黑體" pitchFamily="34" charset="-120"/>
-                <a:cs typeface="Calibri" panose="020F0502020204030204" pitchFamily="34" charset="0"/>
-              </a:rPr>
-              <a:t>Ngợi khen danh Ngài mãi không thôi</a:t>
-            </a:r>
-          </a:p>
-        </p:txBody>
-      </p:sp>
-      <p:sp>
-        <p:nvSpPr>
-          <p:cNvPr id="6" name="TextBox 5"/>
-          <p:cNvSpPr txBox="1"/>
-          <p:nvPr/>
-        </p:nvSpPr>
-        <p:spPr>
-          <a:xfrm>
-            <a:off x="0" y="5157192"/>
-            <a:ext cx="12192000" cy="748988"/>
-          </a:xfrm>
-          <a:prstGeom prst="rect">
-            <a:avLst/>
-          </a:prstGeom>
-          <a:noFill/>
-        </p:spPr>
-        <p:txBody>
-          <a:bodyPr wrap="square" rtlCol="0">
-            <a:spAutoFit/>
-          </a:bodyPr>
-          <a:lstStyle/>
-          <a:p>
-            <a:pPr algn="ctr"/>
-            <a:r>
-              <a:rPr lang="en-US" sz="4267" b="1" dirty="0">
-                <a:solidFill>
-                  <a:srgbClr val="660033"/>
-                </a:solidFill>
-                <a:latin typeface="Microsoft JhengHei" panose="020B0604030504040204" pitchFamily="34" charset="-120"/>
-                <a:ea typeface="Microsoft JhengHei" panose="020B0604030504040204" pitchFamily="34" charset="-120"/>
-              </a:rPr>
-              <a:t>( </a:t>
-            </a:r>
-            <a:r>
-              <a:rPr lang="zh-CN" altLang="en-US" sz="4267" b="1" dirty="0" smtClean="0">
-                <a:solidFill>
-                  <a:srgbClr val="660033"/>
-                </a:solidFill>
-                <a:latin typeface="Microsoft JhengHei" panose="020B0604030504040204" pitchFamily="34" charset="-120"/>
-                <a:ea typeface="Microsoft JhengHei" panose="020B0604030504040204" pitchFamily="34" charset="-120"/>
-              </a:rPr>
-              <a:t>副</a:t>
-            </a:r>
-            <a:r>
-              <a:rPr lang="en-US" sz="4267" b="1" dirty="0" smtClean="0">
-                <a:solidFill>
-                  <a:srgbClr val="660033"/>
-                </a:solidFill>
-                <a:latin typeface="Microsoft JhengHei" panose="020B0604030504040204" pitchFamily="34" charset="-120"/>
-                <a:ea typeface="Microsoft JhengHei" panose="020B0604030504040204" pitchFamily="34" charset="-120"/>
-              </a:rPr>
-              <a:t> </a:t>
-            </a:r>
-            <a:r>
-              <a:rPr lang="en-US" sz="4267" b="1" dirty="0">
-                <a:solidFill>
-                  <a:srgbClr val="660033"/>
-                </a:solidFill>
-                <a:latin typeface="Microsoft JhengHei" panose="020B0604030504040204" pitchFamily="34" charset="-120"/>
-                <a:ea typeface="Microsoft JhengHei" panose="020B0604030504040204" pitchFamily="34" charset="-120"/>
-              </a:rPr>
-              <a:t>)</a:t>
+              <a:t> )</a:t>
             </a:r>
             <a:endParaRPr lang="vi-VN" sz="4267" b="1" dirty="0">
               <a:solidFill>
@@ -4673,29 +4140,25 @@
               <a:buNone/>
             </a:pPr>
             <a:r>
-              <a:rPr lang="vi-VN" sz="4000" b="1" dirty="0" smtClean="0">
+              <a:rPr lang="vi-VN" sz="4000" b="1" dirty="0">
                 <a:solidFill>
                   <a:srgbClr val="000066"/>
                 </a:solidFill>
-                <a:effectLst/>
                 <a:latin typeface="Calibri" panose="020F0502020204030204" pitchFamily="34" charset="0"/>
                 <a:ea typeface="微軟正黑體" pitchFamily="34" charset="-120"/>
                 <a:cs typeface="Calibri" panose="020F0502020204030204" pitchFamily="34" charset="0"/>
               </a:rPr>
-              <a:t>Những </a:t>
-            </a:r>
-            <a:r>
-              <a:rPr lang="vi-VN" sz="4000" b="1" dirty="0">
-                <a:solidFill>
-                  <a:srgbClr val="000066"/>
-                </a:solidFill>
-                <a:effectLst/>
-                <a:latin typeface="Calibri" panose="020F0502020204030204" pitchFamily="34" charset="0"/>
-                <a:ea typeface="微軟正黑體" pitchFamily="34" charset="-120"/>
-                <a:cs typeface="Calibri" panose="020F0502020204030204" pitchFamily="34" charset="0"/>
-              </a:rPr>
-              <a:t>con cò ngoài đồng chẳng thiếu thốn điều gì</a:t>
-            </a:r>
+              <a:t>Chim cò trắng giữa đồng, chẳng thiếu điều chi</a:t>
+            </a:r>
+            <a:endParaRPr lang="vi-VN" sz="4000" b="1" dirty="0">
+              <a:solidFill>
+                <a:srgbClr val="000066"/>
+              </a:solidFill>
+              <a:effectLst/>
+              <a:latin typeface="Calibri" panose="020F0502020204030204" pitchFamily="34" charset="0"/>
+              <a:ea typeface="微軟正黑體" pitchFamily="34" charset="-120"/>
+              <a:cs typeface="Calibri" panose="020F0502020204030204" pitchFamily="34" charset="0"/>
+            </a:endParaRPr>
           </a:p>
         </p:txBody>
       </p:sp>
@@ -4733,34 +4196,24 @@
               <a:t>( </a:t>
             </a:r>
             <a:r>
-              <a:rPr lang="zh-CN" altLang="en-US" sz="4267" b="1" dirty="0" smtClean="0">
+              <a:rPr lang="zh-CN" altLang="en-US" sz="4267" b="1" dirty="0">
                 <a:solidFill>
                   <a:srgbClr val="660033"/>
                 </a:solidFill>
                 <a:latin typeface="Microsoft JhengHei" panose="020B0604030504040204" pitchFamily="34" charset="-120"/>
                 <a:ea typeface="Microsoft JhengHei" panose="020B0604030504040204" pitchFamily="34" charset="-120"/>
               </a:rPr>
-              <a:t>正</a:t>
-            </a:r>
-            <a:r>
-              <a:rPr lang="en-US" sz="4267" b="1" dirty="0" smtClean="0">
+              <a:t>正歌</a:t>
+            </a:r>
+            <a:r>
+              <a:rPr lang="en-US" sz="4267" b="1" dirty="0">
                 <a:solidFill>
                   <a:srgbClr val="660033"/>
                 </a:solidFill>
                 <a:latin typeface="Microsoft JhengHei" panose="020B0604030504040204" pitchFamily="34" charset="-120"/>
                 <a:ea typeface="Microsoft JhengHei" panose="020B0604030504040204" pitchFamily="34" charset="-120"/>
               </a:rPr>
-              <a:t> </a:t>
-            </a:r>
-            <a:r>
-              <a:rPr lang="en-US" sz="4267" b="1" dirty="0">
-                <a:solidFill>
-                  <a:srgbClr val="660033"/>
-                </a:solidFill>
-                <a:latin typeface="Microsoft JhengHei" panose="020B0604030504040204" pitchFamily="34" charset="-120"/>
-                <a:ea typeface="Microsoft JhengHei" panose="020B0604030504040204" pitchFamily="34" charset="-120"/>
-              </a:rPr>
-              <a:t>)</a:t>
+              <a:t> )</a:t>
             </a:r>
             <a:endParaRPr lang="vi-VN" sz="4267" b="1" dirty="0">
               <a:solidFill>
@@ -5013,13 +4466,21 @@
                 <a:solidFill>
                   <a:srgbClr val="000066"/>
                 </a:solidFill>
-                <a:effectLst/>
                 <a:latin typeface="Calibri" panose="020F0502020204030204" pitchFamily="34" charset="0"/>
                 <a:ea typeface="微軟正黑體" pitchFamily="34" charset="-120"/>
                 <a:cs typeface="Calibri" panose="020F0502020204030204" pitchFamily="34" charset="0"/>
               </a:rPr>
-              <a:t>Những hoa huệ trên núi lại thơm ngát vào mùa xuân</a:t>
-            </a:r>
+              <a:t>Hoa huệ trên núi cao, xuân về tỏa hương</a:t>
+            </a:r>
+            <a:endParaRPr lang="vi-VN" sz="4000" b="1" dirty="0">
+              <a:solidFill>
+                <a:srgbClr val="000066"/>
+              </a:solidFill>
+              <a:effectLst/>
+              <a:latin typeface="Calibri" panose="020F0502020204030204" pitchFamily="34" charset="0"/>
+              <a:ea typeface="微軟正黑體" pitchFamily="34" charset="-120"/>
+              <a:cs typeface="Calibri" panose="020F0502020204030204" pitchFamily="34" charset="0"/>
+            </a:endParaRPr>
           </a:p>
         </p:txBody>
       </p:sp>
@@ -5057,34 +4518,24 @@
               <a:t>( </a:t>
             </a:r>
             <a:r>
-              <a:rPr lang="zh-CN" altLang="en-US" sz="4267" b="1" dirty="0" smtClean="0">
+              <a:rPr lang="zh-CN" altLang="en-US" sz="4267" b="1" dirty="0">
                 <a:solidFill>
                   <a:srgbClr val="660033"/>
                 </a:solidFill>
                 <a:latin typeface="Microsoft JhengHei" panose="020B0604030504040204" pitchFamily="34" charset="-120"/>
                 <a:ea typeface="Microsoft JhengHei" panose="020B0604030504040204" pitchFamily="34" charset="-120"/>
               </a:rPr>
-              <a:t>正</a:t>
-            </a:r>
-            <a:r>
-              <a:rPr lang="en-US" sz="4267" b="1" dirty="0" smtClean="0">
+              <a:t>正歌</a:t>
+            </a:r>
+            <a:r>
+              <a:rPr lang="en-US" sz="4267" b="1" dirty="0">
                 <a:solidFill>
                   <a:srgbClr val="660033"/>
                 </a:solidFill>
                 <a:latin typeface="Microsoft JhengHei" panose="020B0604030504040204" pitchFamily="34" charset="-120"/>
                 <a:ea typeface="Microsoft JhengHei" panose="020B0604030504040204" pitchFamily="34" charset="-120"/>
               </a:rPr>
-              <a:t> </a:t>
-            </a:r>
-            <a:r>
-              <a:rPr lang="en-US" sz="4267" b="1" dirty="0">
-                <a:solidFill>
-                  <a:srgbClr val="660033"/>
-                </a:solidFill>
-                <a:latin typeface="Microsoft JhengHei" panose="020B0604030504040204" pitchFamily="34" charset="-120"/>
-                <a:ea typeface="Microsoft JhengHei" panose="020B0604030504040204" pitchFamily="34" charset="-120"/>
-              </a:rPr>
-              <a:t>)</a:t>
+              <a:t> )</a:t>
             </a:r>
             <a:endParaRPr lang="vi-VN" sz="4267" b="1" dirty="0">
               <a:solidFill>
@@ -5158,7 +4609,7 @@
                 <a:latin typeface="微軟正黑體" pitchFamily="34" charset="-120"/>
                 <a:ea typeface="微軟正黑體" pitchFamily="34" charset="-120"/>
               </a:rPr>
-              <a:t>總是全能的上帝</a:t>
+              <a:t>總是全能的上帝  每日賞賜真福氣</a:t>
             </a:r>
             <a:endParaRPr lang="en-US" altLang="zh-CN" sz="6400" b="1" dirty="0">
               <a:solidFill>
@@ -5337,13 +4788,21 @@
                 <a:solidFill>
                   <a:srgbClr val="000066"/>
                 </a:solidFill>
-                <a:effectLst/>
                 <a:latin typeface="Calibri" panose="020F0502020204030204" pitchFamily="34" charset="0"/>
                 <a:ea typeface="微軟正黑體" pitchFamily="34" charset="-120"/>
                 <a:cs typeface="Calibri" panose="020F0502020204030204" pitchFamily="34" charset="0"/>
               </a:rPr>
-              <a:t>Tất cả đều do Đức Chúa Trời toàn năng</a:t>
-            </a:r>
+              <a:t>Đó là phước hạnh của Chúa toàn năng ban cho mỗi ngày</a:t>
+            </a:r>
+            <a:endParaRPr lang="vi-VN" sz="4000" b="1" dirty="0">
+              <a:solidFill>
+                <a:srgbClr val="000066"/>
+              </a:solidFill>
+              <a:effectLst/>
+              <a:latin typeface="Calibri" panose="020F0502020204030204" pitchFamily="34" charset="0"/>
+              <a:ea typeface="微軟正黑體" pitchFamily="34" charset="-120"/>
+              <a:cs typeface="Calibri" panose="020F0502020204030204" pitchFamily="34" charset="0"/>
+            </a:endParaRPr>
           </a:p>
         </p:txBody>
       </p:sp>
@@ -5381,34 +4840,24 @@
               <a:t>( </a:t>
             </a:r>
             <a:r>
-              <a:rPr lang="zh-CN" altLang="en-US" sz="4267" b="1" dirty="0" smtClean="0">
+              <a:rPr lang="zh-CN" altLang="en-US" sz="4267" b="1" dirty="0">
                 <a:solidFill>
                   <a:srgbClr val="660033"/>
                 </a:solidFill>
                 <a:latin typeface="Microsoft JhengHei" panose="020B0604030504040204" pitchFamily="34" charset="-120"/>
                 <a:ea typeface="Microsoft JhengHei" panose="020B0604030504040204" pitchFamily="34" charset="-120"/>
               </a:rPr>
-              <a:t>正</a:t>
-            </a:r>
-            <a:r>
-              <a:rPr lang="en-US" sz="4267" b="1" dirty="0" smtClean="0">
+              <a:t>正歌</a:t>
+            </a:r>
+            <a:r>
+              <a:rPr lang="en-US" sz="4267" b="1" dirty="0">
                 <a:solidFill>
                   <a:srgbClr val="660033"/>
                 </a:solidFill>
                 <a:latin typeface="Microsoft JhengHei" panose="020B0604030504040204" pitchFamily="34" charset="-120"/>
                 <a:ea typeface="Microsoft JhengHei" panose="020B0604030504040204" pitchFamily="34" charset="-120"/>
               </a:rPr>
-              <a:t> </a:t>
-            </a:r>
-            <a:r>
-              <a:rPr lang="en-US" sz="4267" b="1" dirty="0">
-                <a:solidFill>
-                  <a:srgbClr val="660033"/>
-                </a:solidFill>
-                <a:latin typeface="Microsoft JhengHei" panose="020B0604030504040204" pitchFamily="34" charset="-120"/>
-                <a:ea typeface="Microsoft JhengHei" panose="020B0604030504040204" pitchFamily="34" charset="-120"/>
-              </a:rPr>
-              <a:t>)</a:t>
+              <a:t> )</a:t>
             </a:r>
             <a:endParaRPr lang="vi-VN" sz="4267" b="1" dirty="0">
               <a:solidFill>
@@ -5482,7 +4931,7 @@
                 <a:latin typeface="微軟正黑體" pitchFamily="34" charset="-120"/>
                 <a:ea typeface="微軟正黑體" pitchFamily="34" charset="-120"/>
               </a:rPr>
-              <a:t>每日賞賜真福氣</a:t>
+              <a:t>使地上發芽  結實</a:t>
             </a:r>
             <a:endParaRPr lang="en-US" altLang="zh-CN" sz="6400" b="1" dirty="0">
               <a:solidFill>
@@ -5661,13 +5110,21 @@
                 <a:solidFill>
                   <a:srgbClr val="000066"/>
                 </a:solidFill>
-                <a:effectLst/>
                 <a:latin typeface="Calibri" panose="020F0502020204030204" pitchFamily="34" charset="0"/>
                 <a:ea typeface="微軟正黑體" pitchFamily="34" charset="-120"/>
                 <a:cs typeface="Calibri" panose="020F0502020204030204" pitchFamily="34" charset="0"/>
               </a:rPr>
-              <a:t>mỗi ngày ban phước hạnh</a:t>
-            </a:r>
+              <a:t>Ngài khiến đất nảy mầm sinh trái</a:t>
+            </a:r>
+            <a:endParaRPr lang="vi-VN" sz="4000" b="1" dirty="0">
+              <a:solidFill>
+                <a:srgbClr val="000066"/>
+              </a:solidFill>
+              <a:effectLst/>
+              <a:latin typeface="Calibri" panose="020F0502020204030204" pitchFamily="34" charset="0"/>
+              <a:ea typeface="微軟正黑體" pitchFamily="34" charset="-120"/>
+              <a:cs typeface="Calibri" panose="020F0502020204030204" pitchFamily="34" charset="0"/>
+            </a:endParaRPr>
           </a:p>
         </p:txBody>
       </p:sp>
@@ -5705,34 +5162,24 @@
               <a:t>( </a:t>
             </a:r>
             <a:r>
-              <a:rPr lang="zh-CN" altLang="en-US" sz="4267" b="1" dirty="0" smtClean="0">
+              <a:rPr lang="zh-CN" altLang="en-US" sz="4267" b="1" dirty="0">
                 <a:solidFill>
                   <a:srgbClr val="660033"/>
                 </a:solidFill>
                 <a:latin typeface="Microsoft JhengHei" panose="020B0604030504040204" pitchFamily="34" charset="-120"/>
                 <a:ea typeface="Microsoft JhengHei" panose="020B0604030504040204" pitchFamily="34" charset="-120"/>
               </a:rPr>
-              <a:t>正</a:t>
-            </a:r>
-            <a:r>
-              <a:rPr lang="en-US" sz="4267" b="1" dirty="0" smtClean="0">
+              <a:t>正歌</a:t>
+            </a:r>
+            <a:r>
+              <a:rPr lang="en-US" sz="4267" b="1" dirty="0">
                 <a:solidFill>
                   <a:srgbClr val="660033"/>
                 </a:solidFill>
                 <a:latin typeface="Microsoft JhengHei" panose="020B0604030504040204" pitchFamily="34" charset="-120"/>
                 <a:ea typeface="Microsoft JhengHei" panose="020B0604030504040204" pitchFamily="34" charset="-120"/>
               </a:rPr>
-              <a:t> </a:t>
-            </a:r>
-            <a:r>
-              <a:rPr lang="en-US" sz="4267" b="1" dirty="0">
-                <a:solidFill>
-                  <a:srgbClr val="660033"/>
-                </a:solidFill>
-                <a:latin typeface="Microsoft JhengHei" panose="020B0604030504040204" pitchFamily="34" charset="-120"/>
-                <a:ea typeface="Microsoft JhengHei" panose="020B0604030504040204" pitchFamily="34" charset="-120"/>
-              </a:rPr>
-              <a:t>)</a:t>
+              <a:t> )</a:t>
             </a:r>
             <a:endParaRPr lang="vi-VN" sz="4267" b="1" dirty="0">
               <a:solidFill>
@@ -5746,7 +5193,7 @@
     </p:spTree>
     <p:extLst>
       <p:ext uri="{BB962C8B-B14F-4D97-AF65-F5344CB8AC3E}">
-        <p14:creationId xmlns:p14="http://schemas.microsoft.com/office/powerpoint/2010/main" val="4249969537"/>
+        <p14:creationId xmlns:p14="http://schemas.microsoft.com/office/powerpoint/2010/main" val="655321719"/>
       </p:ext>
     </p:extLst>
   </p:cSld>
@@ -5806,7 +5253,7 @@
                 <a:latin typeface="微軟正黑體" pitchFamily="34" charset="-120"/>
                 <a:ea typeface="微軟正黑體" pitchFamily="34" charset="-120"/>
               </a:rPr>
-              <a:t>使地上發芽  結實</a:t>
+              <a:t>顯出慈愛的根據</a:t>
             </a:r>
             <a:endParaRPr lang="en-US" altLang="zh-CN" sz="6400" b="1" dirty="0">
               <a:solidFill>
@@ -5981,17 +5428,36 @@
               <a:buNone/>
             </a:pPr>
             <a:r>
-              <a:rPr lang="vi-VN" sz="4000" b="1" dirty="0">
+              <a:rPr lang="en-US" sz="4000" b="1" dirty="0">
                 <a:solidFill>
                   <a:srgbClr val="000066"/>
                 </a:solidFill>
-                <a:effectLst/>
                 <a:latin typeface="Calibri" panose="020F0502020204030204" pitchFamily="34" charset="0"/>
                 <a:ea typeface="微軟正黑體" pitchFamily="34" charset="-120"/>
                 <a:cs typeface="Calibri" panose="020F0502020204030204" pitchFamily="34" charset="0"/>
               </a:rPr>
-              <a:t>Khiến cho mặt đất nảy mầm</a:t>
-            </a:r>
+              <a:t>B</a:t>
+            </a:r>
+            <a:r>
+              <a:rPr lang="vi-VN" sz="4000" b="1" dirty="0">
+                <a:solidFill>
+                  <a:srgbClr val="000066"/>
+                </a:solidFill>
+                <a:latin typeface="Calibri" panose="020F0502020204030204" pitchFamily="34" charset="0"/>
+                <a:ea typeface="微軟正黑體" pitchFamily="34" charset="-120"/>
+                <a:cs typeface="Calibri" panose="020F0502020204030204" pitchFamily="34" charset="0"/>
+              </a:rPr>
+              <a:t>ày tỏ tình yêu của Ngài</a:t>
+            </a:r>
+            <a:endParaRPr lang="vi-VN" sz="4000" b="1" dirty="0">
+              <a:solidFill>
+                <a:srgbClr val="000066"/>
+              </a:solidFill>
+              <a:effectLst/>
+              <a:latin typeface="Calibri" panose="020F0502020204030204" pitchFamily="34" charset="0"/>
+              <a:ea typeface="微軟正黑體" pitchFamily="34" charset="-120"/>
+              <a:cs typeface="Calibri" panose="020F0502020204030204" pitchFamily="34" charset="0"/>
+            </a:endParaRPr>
           </a:p>
         </p:txBody>
       </p:sp>
@@ -6029,34 +5495,24 @@
               <a:t>( </a:t>
             </a:r>
             <a:r>
-              <a:rPr lang="zh-CN" altLang="en-US" sz="4267" b="1" dirty="0" smtClean="0">
+              <a:rPr lang="zh-CN" altLang="en-US" sz="4267" b="1" dirty="0">
                 <a:solidFill>
                   <a:srgbClr val="660033"/>
                 </a:solidFill>
                 <a:latin typeface="Microsoft JhengHei" panose="020B0604030504040204" pitchFamily="34" charset="-120"/>
                 <a:ea typeface="Microsoft JhengHei" panose="020B0604030504040204" pitchFamily="34" charset="-120"/>
               </a:rPr>
-              <a:t>正</a:t>
-            </a:r>
-            <a:r>
-              <a:rPr lang="en-US" sz="4267" b="1" dirty="0" smtClean="0">
+              <a:t>正歌</a:t>
+            </a:r>
+            <a:r>
+              <a:rPr lang="en-US" sz="4267" b="1" dirty="0">
                 <a:solidFill>
                   <a:srgbClr val="660033"/>
                 </a:solidFill>
                 <a:latin typeface="Microsoft JhengHei" panose="020B0604030504040204" pitchFamily="34" charset="-120"/>
                 <a:ea typeface="Microsoft JhengHei" panose="020B0604030504040204" pitchFamily="34" charset="-120"/>
               </a:rPr>
-              <a:t> </a:t>
-            </a:r>
-            <a:r>
-              <a:rPr lang="en-US" sz="4267" b="1" dirty="0">
-                <a:solidFill>
-                  <a:srgbClr val="660033"/>
-                </a:solidFill>
-                <a:latin typeface="Microsoft JhengHei" panose="020B0604030504040204" pitchFamily="34" charset="-120"/>
-                <a:ea typeface="Microsoft JhengHei" panose="020B0604030504040204" pitchFamily="34" charset="-120"/>
-              </a:rPr>
-              <a:t>)</a:t>
+              <a:t> )</a:t>
             </a:r>
             <a:endParaRPr lang="vi-VN" sz="4267" b="1" dirty="0">
               <a:solidFill>
@@ -6070,7 +5526,7 @@
     </p:spTree>
     <p:extLst>
       <p:ext uri="{BB962C8B-B14F-4D97-AF65-F5344CB8AC3E}">
-        <p14:creationId xmlns:p14="http://schemas.microsoft.com/office/powerpoint/2010/main" val="655321719"/>
+        <p14:creationId xmlns:p14="http://schemas.microsoft.com/office/powerpoint/2010/main" val="3969355406"/>
       </p:ext>
     </p:extLst>
   </p:cSld>
@@ -6130,7 +5586,27 @@
                 <a:latin typeface="微軟正黑體" pitchFamily="34" charset="-120"/>
                 <a:ea typeface="微軟正黑體" pitchFamily="34" charset="-120"/>
               </a:rPr>
-              <a:t>顯出慈愛的根據</a:t>
+              <a:t>耶和華祝福滿滿</a:t>
+            </a:r>
+            <a:r>
+              <a:rPr lang="en-US" altLang="zh-CN" sz="6400" b="1" dirty="0">
+                <a:solidFill>
+                  <a:srgbClr val="660033"/>
+                </a:solidFill>
+                <a:latin typeface="微軟正黑體" pitchFamily="34" charset="-120"/>
+                <a:ea typeface="微軟正黑體" pitchFamily="34" charset="-120"/>
+              </a:rPr>
+              <a:t>  </a:t>
+            </a:r>
+            <a:r>
+              <a:rPr lang="zh-CN" altLang="en-US" sz="6400" b="1" dirty="0">
+                <a:solidFill>
+                  <a:srgbClr val="660033"/>
+                </a:solidFill>
+                <a:latin typeface="微軟正黑體" pitchFamily="34" charset="-120"/>
+                <a:ea typeface="微軟正黑體" pitchFamily="34" charset="-120"/>
+              </a:rPr>
+              <a:t>親像海邊土沙</a:t>
             </a:r>
             <a:endParaRPr lang="en-US" altLang="zh-CN" sz="6400" b="1" dirty="0">
               <a:solidFill>
@@ -6309,13 +5785,21 @@
                 <a:solidFill>
                   <a:srgbClr val="000066"/>
                 </a:solidFill>
-                <a:effectLst/>
                 <a:latin typeface="Calibri" panose="020F0502020204030204" pitchFamily="34" charset="0"/>
                 <a:ea typeface="微軟正黑體" pitchFamily="34" charset="-120"/>
                 <a:cs typeface="Calibri" panose="020F0502020204030204" pitchFamily="34" charset="0"/>
               </a:rPr>
-              <a:t>Đều là bằng chứng của tình yêu thương</a:t>
-            </a:r>
+              <a:t>Chúa ban phước lành tràn đầy như cát nơi bờ biển</a:t>
+            </a:r>
+            <a:endParaRPr lang="vi-VN" sz="4000" b="1" dirty="0">
+              <a:solidFill>
+                <a:srgbClr val="000066"/>
+              </a:solidFill>
+              <a:effectLst/>
+              <a:latin typeface="Calibri" panose="020F0502020204030204" pitchFamily="34" charset="0"/>
+              <a:ea typeface="微軟正黑體" pitchFamily="34" charset="-120"/>
+              <a:cs typeface="Calibri" panose="020F0502020204030204" pitchFamily="34" charset="0"/>
+            </a:endParaRPr>
           </a:p>
         </p:txBody>
       </p:sp>
@@ -6353,34 +5837,24 @@
               <a:t>( </a:t>
             </a:r>
             <a:r>
-              <a:rPr lang="zh-CN" altLang="en-US" sz="4267" b="1" dirty="0" smtClean="0">
+              <a:rPr lang="zh-CN" altLang="en-US" sz="4267" b="1" dirty="0">
                 <a:solidFill>
                   <a:srgbClr val="660033"/>
                 </a:solidFill>
                 <a:latin typeface="Microsoft JhengHei" panose="020B0604030504040204" pitchFamily="34" charset="-120"/>
                 <a:ea typeface="Microsoft JhengHei" panose="020B0604030504040204" pitchFamily="34" charset="-120"/>
               </a:rPr>
-              <a:t>正</a:t>
-            </a:r>
-            <a:r>
-              <a:rPr lang="en-US" sz="4267" b="1" dirty="0" smtClean="0">
+              <a:t>副歌</a:t>
+            </a:r>
+            <a:r>
+              <a:rPr lang="en-US" sz="4267" b="1" dirty="0">
                 <a:solidFill>
                   <a:srgbClr val="660033"/>
                 </a:solidFill>
                 <a:latin typeface="Microsoft JhengHei" panose="020B0604030504040204" pitchFamily="34" charset="-120"/>
                 <a:ea typeface="Microsoft JhengHei" panose="020B0604030504040204" pitchFamily="34" charset="-120"/>
               </a:rPr>
-              <a:t> </a:t>
-            </a:r>
-            <a:r>
-              <a:rPr lang="en-US" sz="4267" b="1" dirty="0">
-                <a:solidFill>
-                  <a:srgbClr val="660033"/>
-                </a:solidFill>
-                <a:latin typeface="Microsoft JhengHei" panose="020B0604030504040204" pitchFamily="34" charset="-120"/>
-                <a:ea typeface="Microsoft JhengHei" panose="020B0604030504040204" pitchFamily="34" charset="-120"/>
-              </a:rPr>
-              <a:t>)</a:t>
+              <a:t> )</a:t>
             </a:r>
             <a:endParaRPr lang="vi-VN" sz="4267" b="1" dirty="0">
               <a:solidFill>
@@ -6394,7 +5868,7 @@
     </p:spTree>
     <p:extLst>
       <p:ext uri="{BB962C8B-B14F-4D97-AF65-F5344CB8AC3E}">
-        <p14:creationId xmlns:p14="http://schemas.microsoft.com/office/powerpoint/2010/main" val="3969355406"/>
+        <p14:creationId xmlns:p14="http://schemas.microsoft.com/office/powerpoint/2010/main" val="350610508"/>
       </p:ext>
     </p:extLst>
   </p:cSld>
@@ -6454,27 +5928,7 @@
                 <a:latin typeface="微軟正黑體" pitchFamily="34" charset="-120"/>
                 <a:ea typeface="微軟正黑體" pitchFamily="34" charset="-120"/>
               </a:rPr>
-              <a:t>耶和華祝福滿滿</a:t>
-            </a:r>
-            <a:r>
-              <a:rPr lang="en-US" altLang="zh-CN" sz="6400" b="1" dirty="0">
-                <a:solidFill>
-                  <a:srgbClr val="660033"/>
-                </a:solidFill>
-                <a:latin typeface="微軟正黑體" pitchFamily="34" charset="-120"/>
-                <a:ea typeface="微軟正黑體" pitchFamily="34" charset="-120"/>
-              </a:rPr>
-              <a:t>  </a:t>
-            </a:r>
-            <a:r>
-              <a:rPr lang="zh-CN" altLang="en-US" sz="6400" b="1" dirty="0">
-                <a:solidFill>
-                  <a:srgbClr val="660033"/>
-                </a:solidFill>
-                <a:latin typeface="微軟正黑體" pitchFamily="34" charset="-120"/>
-                <a:ea typeface="微軟正黑體" pitchFamily="34" charset="-120"/>
-              </a:rPr>
-              <a:t>親像海邊土沙</a:t>
+              <a:t>恩典慈愛直到萬世代</a:t>
             </a:r>
             <a:endParaRPr lang="en-US" altLang="zh-CN" sz="6400" b="1" dirty="0">
               <a:solidFill>
@@ -6653,37 +6107,21 @@
                 <a:solidFill>
                   <a:srgbClr val="000066"/>
                 </a:solidFill>
-                <a:effectLst/>
                 <a:latin typeface="Calibri" panose="020F0502020204030204" pitchFamily="34" charset="0"/>
                 <a:ea typeface="微軟正黑體" pitchFamily="34" charset="-120"/>
                 <a:cs typeface="Calibri" panose="020F0502020204030204" pitchFamily="34" charset="0"/>
               </a:rPr>
-              <a:t>Đức Giê-hô-va ban phước dư </a:t>
-            </a:r>
-            <a:r>
-              <a:rPr lang="vi-VN" sz="4000" b="1" dirty="0">
-                <a:solidFill>
-                  <a:srgbClr val="000066"/>
-                </a:solidFill>
-                <a:effectLst/>
-                <a:latin typeface="Calibri" panose="020F0502020204030204" pitchFamily="34" charset="0"/>
-                <a:ea typeface="微軟正黑體" pitchFamily="34" charset="-120"/>
-                <a:cs typeface="Calibri" panose="020F0502020204030204" pitchFamily="34" charset="0"/>
-              </a:rPr>
-              <a:t>dật như </a:t>
-            </a:r>
-            <a:r>
-              <a:rPr lang="vi-VN" sz="4000" b="1" dirty="0">
-                <a:solidFill>
-                  <a:srgbClr val="000066"/>
-                </a:solidFill>
-                <a:effectLst/>
-                <a:latin typeface="Calibri" panose="020F0502020204030204" pitchFamily="34" charset="0"/>
-                <a:ea typeface="微軟正黑體" pitchFamily="34" charset="-120"/>
-                <a:cs typeface="Calibri" panose="020F0502020204030204" pitchFamily="34" charset="0"/>
-              </a:rPr>
-              <a:t>cát ở biển</a:t>
-            </a:r>
+              <a:t>Ân điển tình yêu của Ngài đến muôn đời</a:t>
+            </a:r>
+            <a:endParaRPr lang="vi-VN" sz="4000" b="1" dirty="0">
+              <a:solidFill>
+                <a:srgbClr val="000066"/>
+              </a:solidFill>
+              <a:effectLst/>
+              <a:latin typeface="Calibri" panose="020F0502020204030204" pitchFamily="34" charset="0"/>
+              <a:ea typeface="微軟正黑體" pitchFamily="34" charset="-120"/>
+              <a:cs typeface="Calibri" panose="020F0502020204030204" pitchFamily="34" charset="0"/>
+            </a:endParaRPr>
           </a:p>
         </p:txBody>
       </p:sp>
@@ -6721,34 +6159,24 @@
               <a:t>( </a:t>
             </a:r>
             <a:r>
-              <a:rPr lang="zh-CN" altLang="en-US" sz="4267" b="1" dirty="0" smtClean="0">
+              <a:rPr lang="zh-CN" altLang="en-US" sz="4267" b="1" dirty="0">
                 <a:solidFill>
                   <a:srgbClr val="660033"/>
                 </a:solidFill>
                 <a:latin typeface="Microsoft JhengHei" panose="020B0604030504040204" pitchFamily="34" charset="-120"/>
                 <a:ea typeface="Microsoft JhengHei" panose="020B0604030504040204" pitchFamily="34" charset="-120"/>
               </a:rPr>
-              <a:t>副</a:t>
-            </a:r>
-            <a:r>
-              <a:rPr lang="en-US" sz="4267" b="1" dirty="0" smtClean="0">
+              <a:t>副歌</a:t>
+            </a:r>
+            <a:r>
+              <a:rPr lang="en-US" sz="4267" b="1" dirty="0">
                 <a:solidFill>
                   <a:srgbClr val="660033"/>
                 </a:solidFill>
                 <a:latin typeface="Microsoft JhengHei" panose="020B0604030504040204" pitchFamily="34" charset="-120"/>
                 <a:ea typeface="Microsoft JhengHei" panose="020B0604030504040204" pitchFamily="34" charset="-120"/>
               </a:rPr>
-              <a:t> </a:t>
-            </a:r>
-            <a:r>
-              <a:rPr lang="en-US" sz="4267" b="1" dirty="0">
-                <a:solidFill>
-                  <a:srgbClr val="660033"/>
-                </a:solidFill>
-                <a:latin typeface="Microsoft JhengHei" panose="020B0604030504040204" pitchFamily="34" charset="-120"/>
-                <a:ea typeface="Microsoft JhengHei" panose="020B0604030504040204" pitchFamily="34" charset="-120"/>
-              </a:rPr>
-              <a:t>)</a:t>
+              <a:t> )</a:t>
             </a:r>
             <a:endParaRPr lang="vi-VN" sz="4267" b="1" dirty="0">
               <a:solidFill>
@@ -6762,7 +6190,7 @@
     </p:spTree>
     <p:extLst>
       <p:ext uri="{BB962C8B-B14F-4D97-AF65-F5344CB8AC3E}">
-        <p14:creationId xmlns:p14="http://schemas.microsoft.com/office/powerpoint/2010/main" val="350610508"/>
+        <p14:creationId xmlns:p14="http://schemas.microsoft.com/office/powerpoint/2010/main" val="1882367881"/>
       </p:ext>
     </p:extLst>
   </p:cSld>
@@ -6822,7 +6250,7 @@
                 <a:latin typeface="微軟正黑體" pitchFamily="34" charset="-120"/>
                 <a:ea typeface="微軟正黑體" pitchFamily="34" charset="-120"/>
               </a:rPr>
-              <a:t>恩典慈愛直到萬世代</a:t>
+              <a:t>我要舉手敬拜祂</a:t>
             </a:r>
             <a:endParaRPr lang="en-US" altLang="zh-CN" sz="6400" b="1" dirty="0">
               <a:solidFill>
@@ -7001,13 +6429,21 @@
                 <a:solidFill>
                   <a:srgbClr val="000066"/>
                 </a:solidFill>
-                <a:effectLst/>
                 <a:latin typeface="Calibri" panose="020F0502020204030204" pitchFamily="34" charset="0"/>
                 <a:ea typeface="微軟正黑體" pitchFamily="34" charset="-120"/>
                 <a:cs typeface="Calibri" panose="020F0502020204030204" pitchFamily="34" charset="0"/>
               </a:rPr>
-              <a:t>Tình yêu và ân điển Ngài cho đến ngàn đời</a:t>
-            </a:r>
+              <a:t>Con xin giơ tay chúc tôn Ngài</a:t>
+            </a:r>
+            <a:endParaRPr lang="vi-VN" sz="4000" b="1" dirty="0">
+              <a:solidFill>
+                <a:srgbClr val="000066"/>
+              </a:solidFill>
+              <a:effectLst/>
+              <a:latin typeface="Calibri" panose="020F0502020204030204" pitchFamily="34" charset="0"/>
+              <a:ea typeface="微軟正黑體" pitchFamily="34" charset="-120"/>
+              <a:cs typeface="Calibri" panose="020F0502020204030204" pitchFamily="34" charset="0"/>
+            </a:endParaRPr>
           </a:p>
         </p:txBody>
       </p:sp>
@@ -7045,34 +6481,24 @@
               <a:t>( </a:t>
             </a:r>
             <a:r>
-              <a:rPr lang="zh-CN" altLang="en-US" sz="4267" b="1" dirty="0" smtClean="0">
+              <a:rPr lang="zh-CN" altLang="en-US" sz="4267" b="1" dirty="0">
                 <a:solidFill>
                   <a:srgbClr val="660033"/>
                 </a:solidFill>
                 <a:latin typeface="Microsoft JhengHei" panose="020B0604030504040204" pitchFamily="34" charset="-120"/>
                 <a:ea typeface="Microsoft JhengHei" panose="020B0604030504040204" pitchFamily="34" charset="-120"/>
               </a:rPr>
-              <a:t>副</a:t>
-            </a:r>
-            <a:r>
-              <a:rPr lang="en-US" sz="4267" b="1" dirty="0" smtClean="0">
+              <a:t>副歌</a:t>
+            </a:r>
+            <a:r>
+              <a:rPr lang="en-US" sz="4267" b="1" dirty="0">
                 <a:solidFill>
                   <a:srgbClr val="660033"/>
                 </a:solidFill>
                 <a:latin typeface="Microsoft JhengHei" panose="020B0604030504040204" pitchFamily="34" charset="-120"/>
                 <a:ea typeface="Microsoft JhengHei" panose="020B0604030504040204" pitchFamily="34" charset="-120"/>
               </a:rPr>
-              <a:t> </a:t>
-            </a:r>
-            <a:r>
-              <a:rPr lang="en-US" sz="4267" b="1" dirty="0">
-                <a:solidFill>
-                  <a:srgbClr val="660033"/>
-                </a:solidFill>
-                <a:latin typeface="Microsoft JhengHei" panose="020B0604030504040204" pitchFamily="34" charset="-120"/>
-                <a:ea typeface="Microsoft JhengHei" panose="020B0604030504040204" pitchFamily="34" charset="-120"/>
-              </a:rPr>
-              <a:t>)</a:t>
+              <a:t> )</a:t>
             </a:r>
             <a:endParaRPr lang="vi-VN" sz="4267" b="1" dirty="0">
               <a:solidFill>
@@ -7086,7 +6512,7 @@
     </p:spTree>
     <p:extLst>
       <p:ext uri="{BB962C8B-B14F-4D97-AF65-F5344CB8AC3E}">
-        <p14:creationId xmlns:p14="http://schemas.microsoft.com/office/powerpoint/2010/main" val="1882367881"/>
+        <p14:creationId xmlns:p14="http://schemas.microsoft.com/office/powerpoint/2010/main" val="725653654"/>
       </p:ext>
     </p:extLst>
   </p:cSld>
